--- a/Figures/WQ Exploration with Lag/WQ_exp_with_lag.pptx
+++ b/Figures/WQ Exploration with Lag/WQ_exp_with_lag.pptx
@@ -5,27 +5,15 @@
     <p:sldMasterId id="2147483648" r:id="rId1"/>
   </p:sldMasterIdLst>
   <p:sldIdLst>
-    <p:sldId id="267" r:id="rId2"/>
+    <p:sldId id="256" r:id="rId2"/>
     <p:sldId id="257" r:id="rId3"/>
     <p:sldId id="258" r:id="rId4"/>
-    <p:sldId id="268" r:id="rId5"/>
-    <p:sldId id="269" r:id="rId6"/>
-    <p:sldId id="270" r:id="rId7"/>
-    <p:sldId id="279" r:id="rId8"/>
-    <p:sldId id="280" r:id="rId9"/>
-    <p:sldId id="285" r:id="rId10"/>
-    <p:sldId id="290" r:id="rId11"/>
-    <p:sldId id="291" r:id="rId12"/>
-    <p:sldId id="296" r:id="rId13"/>
-    <p:sldId id="301" r:id="rId14"/>
-    <p:sldId id="302" r:id="rId15"/>
-    <p:sldId id="304" r:id="rId16"/>
-    <p:sldId id="305" r:id="rId17"/>
-    <p:sldId id="306" r:id="rId18"/>
-    <p:sldId id="307" r:id="rId19"/>
-    <p:sldId id="310" r:id="rId20"/>
-    <p:sldId id="308" r:id="rId21"/>
-    <p:sldId id="309" r:id="rId22"/>
+    <p:sldId id="259" r:id="rId5"/>
+    <p:sldId id="260" r:id="rId6"/>
+    <p:sldId id="261" r:id="rId7"/>
+    <p:sldId id="262" r:id="rId8"/>
+    <p:sldId id="263" r:id="rId9"/>
+    <p:sldId id="264" r:id="rId10"/>
   </p:sldIdLst>
   <p:sldSz cx="12192000" cy="6858000"/>
   <p:notesSz cx="6858000" cy="9144000"/>
@@ -149,7 +137,7 @@
           <p:cNvPr id="2" name="Title 1">
             <a:extLst>
               <a:ext uri="{FF2B5EF4-FFF2-40B4-BE49-F238E27FC236}">
-                <a16:creationId xmlns:a16="http://schemas.microsoft.com/office/drawing/2014/main" id="{1A06FAA9-21D0-1615-AF87-689B5C01E5F5}"/>
+                <a16:creationId xmlns:a16="http://schemas.microsoft.com/office/drawing/2014/main" id="{C5BFA5D5-851B-C84F-20E1-200BDE5520A3}"/>
               </a:ext>
             </a:extLst>
           </p:cNvPr>
@@ -186,7 +174,7 @@
           <p:cNvPr id="3" name="Subtitle 2">
             <a:extLst>
               <a:ext uri="{FF2B5EF4-FFF2-40B4-BE49-F238E27FC236}">
-                <a16:creationId xmlns:a16="http://schemas.microsoft.com/office/drawing/2014/main" id="{43AE30D4-62F9-B344-717B-38A6A014139E}"/>
+                <a16:creationId xmlns:a16="http://schemas.microsoft.com/office/drawing/2014/main" id="{8A43ADDC-E320-7A76-8209-DE980E9DF4F7}"/>
               </a:ext>
             </a:extLst>
           </p:cNvPr>
@@ -256,7 +244,7 @@
           <p:cNvPr id="4" name="Date Placeholder 3">
             <a:extLst>
               <a:ext uri="{FF2B5EF4-FFF2-40B4-BE49-F238E27FC236}">
-                <a16:creationId xmlns:a16="http://schemas.microsoft.com/office/drawing/2014/main" id="{BA4DCF2C-EB23-6A7C-EAF1-80A2EF363B7B}"/>
+                <a16:creationId xmlns:a16="http://schemas.microsoft.com/office/drawing/2014/main" id="{3D6A3F77-F79A-6286-B7C8-F18B77296632}"/>
               </a:ext>
             </a:extLst>
           </p:cNvPr>
@@ -272,9 +260,9 @@
           <a:bodyPr/>
           <a:lstStyle/>
           <a:p>
-            <a:fld id="{62062B16-6337-4A67-9E89-A0A4A3D21F2F}" type="datetimeFigureOut">
+            <a:fld id="{3517CA85-81D0-4CB8-8648-C6526E64953F}" type="datetimeFigureOut">
               <a:rPr lang="en-US" smtClean="0"/>
-              <a:t>8/21/2025</a:t>
+              <a:t>8/27/2025</a:t>
             </a:fld>
             <a:endParaRPr lang="en-US"/>
           </a:p>
@@ -285,7 +273,7 @@
           <p:cNvPr id="5" name="Footer Placeholder 4">
             <a:extLst>
               <a:ext uri="{FF2B5EF4-FFF2-40B4-BE49-F238E27FC236}">
-                <a16:creationId xmlns:a16="http://schemas.microsoft.com/office/drawing/2014/main" id="{5F093A3A-3887-09DF-2F9B-45F8E1A6B553}"/>
+                <a16:creationId xmlns:a16="http://schemas.microsoft.com/office/drawing/2014/main" id="{E18E2AA2-28F9-3083-970E-319A3D6D5FC4}"/>
               </a:ext>
             </a:extLst>
           </p:cNvPr>
@@ -310,7 +298,7 @@
           <p:cNvPr id="6" name="Slide Number Placeholder 5">
             <a:extLst>
               <a:ext uri="{FF2B5EF4-FFF2-40B4-BE49-F238E27FC236}">
-                <a16:creationId xmlns:a16="http://schemas.microsoft.com/office/drawing/2014/main" id="{9F05FDCF-83EE-8802-8285-517536D0E60D}"/>
+                <a16:creationId xmlns:a16="http://schemas.microsoft.com/office/drawing/2014/main" id="{D738DE60-CF69-8F6B-2D48-F8FC61CE9ADE}"/>
               </a:ext>
             </a:extLst>
           </p:cNvPr>
@@ -326,7 +314,7 @@
           <a:bodyPr/>
           <a:lstStyle/>
           <a:p>
-            <a:fld id="{5826882B-EDEA-49F1-86AC-CF7DFB1A306D}" type="slidenum">
+            <a:fld id="{9A8414FD-6C3B-4210-8B74-01572F04427B}" type="slidenum">
               <a:rPr lang="en-US" smtClean="0"/>
               <a:t>‹#›</a:t>
             </a:fld>
@@ -337,7 +325,7 @@
     </p:spTree>
     <p:extLst>
       <p:ext uri="{BB962C8B-B14F-4D97-AF65-F5344CB8AC3E}">
-        <p14:creationId xmlns:p14="http://schemas.microsoft.com/office/powerpoint/2010/main" val="2616753224"/>
+        <p14:creationId xmlns:p14="http://schemas.microsoft.com/office/powerpoint/2010/main" val="2542355387"/>
       </p:ext>
     </p:extLst>
   </p:cSld>
@@ -369,7 +357,7 @@
           <p:cNvPr id="2" name="Title 1">
             <a:extLst>
               <a:ext uri="{FF2B5EF4-FFF2-40B4-BE49-F238E27FC236}">
-                <a16:creationId xmlns:a16="http://schemas.microsoft.com/office/drawing/2014/main" id="{F34A3F08-0E69-6775-D32B-FAFC38CC10B3}"/>
+                <a16:creationId xmlns:a16="http://schemas.microsoft.com/office/drawing/2014/main" id="{9CD50940-AB07-F5C7-4966-99D9E0B43226}"/>
               </a:ext>
             </a:extLst>
           </p:cNvPr>
@@ -397,7 +385,7 @@
           <p:cNvPr id="3" name="Vertical Text Placeholder 2">
             <a:extLst>
               <a:ext uri="{FF2B5EF4-FFF2-40B4-BE49-F238E27FC236}">
-                <a16:creationId xmlns:a16="http://schemas.microsoft.com/office/drawing/2014/main" id="{C25B258A-FE12-9EC2-2178-9DB8BC58C268}"/>
+                <a16:creationId xmlns:a16="http://schemas.microsoft.com/office/drawing/2014/main" id="{1BD2F292-56C5-E719-6EE1-E4E364FCD5A3}"/>
               </a:ext>
             </a:extLst>
           </p:cNvPr>
@@ -454,7 +442,7 @@
           <p:cNvPr id="4" name="Date Placeholder 3">
             <a:extLst>
               <a:ext uri="{FF2B5EF4-FFF2-40B4-BE49-F238E27FC236}">
-                <a16:creationId xmlns:a16="http://schemas.microsoft.com/office/drawing/2014/main" id="{55D0E66D-26AF-328A-0E7C-EFFA4776D2AB}"/>
+                <a16:creationId xmlns:a16="http://schemas.microsoft.com/office/drawing/2014/main" id="{46B7C379-DEC6-6D08-0A0E-C29A7B8C96B3}"/>
               </a:ext>
             </a:extLst>
           </p:cNvPr>
@@ -470,9 +458,9 @@
           <a:bodyPr/>
           <a:lstStyle/>
           <a:p>
-            <a:fld id="{62062B16-6337-4A67-9E89-A0A4A3D21F2F}" type="datetimeFigureOut">
+            <a:fld id="{3517CA85-81D0-4CB8-8648-C6526E64953F}" type="datetimeFigureOut">
               <a:rPr lang="en-US" smtClean="0"/>
-              <a:t>8/21/2025</a:t>
+              <a:t>8/27/2025</a:t>
             </a:fld>
             <a:endParaRPr lang="en-US"/>
           </a:p>
@@ -483,7 +471,7 @@
           <p:cNvPr id="5" name="Footer Placeholder 4">
             <a:extLst>
               <a:ext uri="{FF2B5EF4-FFF2-40B4-BE49-F238E27FC236}">
-                <a16:creationId xmlns:a16="http://schemas.microsoft.com/office/drawing/2014/main" id="{6ACAE325-4428-3CF9-622F-AE454530ACB9}"/>
+                <a16:creationId xmlns:a16="http://schemas.microsoft.com/office/drawing/2014/main" id="{9D5F2551-C6FE-2C48-4294-61500661CEE6}"/>
               </a:ext>
             </a:extLst>
           </p:cNvPr>
@@ -508,7 +496,7 @@
           <p:cNvPr id="6" name="Slide Number Placeholder 5">
             <a:extLst>
               <a:ext uri="{FF2B5EF4-FFF2-40B4-BE49-F238E27FC236}">
-                <a16:creationId xmlns:a16="http://schemas.microsoft.com/office/drawing/2014/main" id="{7A464DDD-8369-A770-CF64-F8A106AA3B56}"/>
+                <a16:creationId xmlns:a16="http://schemas.microsoft.com/office/drawing/2014/main" id="{1277C712-3BE6-1E17-8498-F20A2AA9346A}"/>
               </a:ext>
             </a:extLst>
           </p:cNvPr>
@@ -524,7 +512,7 @@
           <a:bodyPr/>
           <a:lstStyle/>
           <a:p>
-            <a:fld id="{5826882B-EDEA-49F1-86AC-CF7DFB1A306D}" type="slidenum">
+            <a:fld id="{9A8414FD-6C3B-4210-8B74-01572F04427B}" type="slidenum">
               <a:rPr lang="en-US" smtClean="0"/>
               <a:t>‹#›</a:t>
             </a:fld>
@@ -535,7 +523,7 @@
     </p:spTree>
     <p:extLst>
       <p:ext uri="{BB962C8B-B14F-4D97-AF65-F5344CB8AC3E}">
-        <p14:creationId xmlns:p14="http://schemas.microsoft.com/office/powerpoint/2010/main" val="58792892"/>
+        <p14:creationId xmlns:p14="http://schemas.microsoft.com/office/powerpoint/2010/main" val="1794756225"/>
       </p:ext>
     </p:extLst>
   </p:cSld>
@@ -567,7 +555,7 @@
           <p:cNvPr id="2" name="Vertical Title 1">
             <a:extLst>
               <a:ext uri="{FF2B5EF4-FFF2-40B4-BE49-F238E27FC236}">
-                <a16:creationId xmlns:a16="http://schemas.microsoft.com/office/drawing/2014/main" id="{1304E1E6-4728-76D5-61D2-0AAC4570497D}"/>
+                <a16:creationId xmlns:a16="http://schemas.microsoft.com/office/drawing/2014/main" id="{BE75FA6C-C39A-D1DC-588C-E015E4458C81}"/>
               </a:ext>
             </a:extLst>
           </p:cNvPr>
@@ -600,7 +588,7 @@
           <p:cNvPr id="3" name="Vertical Text Placeholder 2">
             <a:extLst>
               <a:ext uri="{FF2B5EF4-FFF2-40B4-BE49-F238E27FC236}">
-                <a16:creationId xmlns:a16="http://schemas.microsoft.com/office/drawing/2014/main" id="{436A7DA2-ED6A-B939-785C-497F912FB928}"/>
+                <a16:creationId xmlns:a16="http://schemas.microsoft.com/office/drawing/2014/main" id="{2A03E5E4-1500-259B-CDEA-CF2465C4E2D8}"/>
               </a:ext>
             </a:extLst>
           </p:cNvPr>
@@ -662,7 +650,7 @@
           <p:cNvPr id="4" name="Date Placeholder 3">
             <a:extLst>
               <a:ext uri="{FF2B5EF4-FFF2-40B4-BE49-F238E27FC236}">
-                <a16:creationId xmlns:a16="http://schemas.microsoft.com/office/drawing/2014/main" id="{5B2D31AA-F300-85D5-1AB4-97B4F73A5DD6}"/>
+                <a16:creationId xmlns:a16="http://schemas.microsoft.com/office/drawing/2014/main" id="{2CC94CBF-1E45-BA07-FDA4-874893347940}"/>
               </a:ext>
             </a:extLst>
           </p:cNvPr>
@@ -678,9 +666,9 @@
           <a:bodyPr/>
           <a:lstStyle/>
           <a:p>
-            <a:fld id="{62062B16-6337-4A67-9E89-A0A4A3D21F2F}" type="datetimeFigureOut">
+            <a:fld id="{3517CA85-81D0-4CB8-8648-C6526E64953F}" type="datetimeFigureOut">
               <a:rPr lang="en-US" smtClean="0"/>
-              <a:t>8/21/2025</a:t>
+              <a:t>8/27/2025</a:t>
             </a:fld>
             <a:endParaRPr lang="en-US"/>
           </a:p>
@@ -691,7 +679,7 @@
           <p:cNvPr id="5" name="Footer Placeholder 4">
             <a:extLst>
               <a:ext uri="{FF2B5EF4-FFF2-40B4-BE49-F238E27FC236}">
-                <a16:creationId xmlns:a16="http://schemas.microsoft.com/office/drawing/2014/main" id="{FC016C8D-1C97-A8C8-AD55-4D78037C157E}"/>
+                <a16:creationId xmlns:a16="http://schemas.microsoft.com/office/drawing/2014/main" id="{F79CACC1-CECF-6AEC-9EAD-BF4A2124FEF2}"/>
               </a:ext>
             </a:extLst>
           </p:cNvPr>
@@ -716,7 +704,7 @@
           <p:cNvPr id="6" name="Slide Number Placeholder 5">
             <a:extLst>
               <a:ext uri="{FF2B5EF4-FFF2-40B4-BE49-F238E27FC236}">
-                <a16:creationId xmlns:a16="http://schemas.microsoft.com/office/drawing/2014/main" id="{B17142EA-3BA9-E742-7809-809F7DFE81C8}"/>
+                <a16:creationId xmlns:a16="http://schemas.microsoft.com/office/drawing/2014/main" id="{6FAEF28A-34C7-6794-3598-C558C6600FD7}"/>
               </a:ext>
             </a:extLst>
           </p:cNvPr>
@@ -732,7 +720,7 @@
           <a:bodyPr/>
           <a:lstStyle/>
           <a:p>
-            <a:fld id="{5826882B-EDEA-49F1-86AC-CF7DFB1A306D}" type="slidenum">
+            <a:fld id="{9A8414FD-6C3B-4210-8B74-01572F04427B}" type="slidenum">
               <a:rPr lang="en-US" smtClean="0"/>
               <a:t>‹#›</a:t>
             </a:fld>
@@ -743,7 +731,7 @@
     </p:spTree>
     <p:extLst>
       <p:ext uri="{BB962C8B-B14F-4D97-AF65-F5344CB8AC3E}">
-        <p14:creationId xmlns:p14="http://schemas.microsoft.com/office/powerpoint/2010/main" val="4097649440"/>
+        <p14:creationId xmlns:p14="http://schemas.microsoft.com/office/powerpoint/2010/main" val="449779574"/>
       </p:ext>
     </p:extLst>
   </p:cSld>
@@ -775,7 +763,7 @@
           <p:cNvPr id="2" name="Title 1">
             <a:extLst>
               <a:ext uri="{FF2B5EF4-FFF2-40B4-BE49-F238E27FC236}">
-                <a16:creationId xmlns:a16="http://schemas.microsoft.com/office/drawing/2014/main" id="{530E0703-A611-6F6A-D211-9DC831488A24}"/>
+                <a16:creationId xmlns:a16="http://schemas.microsoft.com/office/drawing/2014/main" id="{E2C07FF1-ECD2-0F60-DC3F-4D81524D9408}"/>
               </a:ext>
             </a:extLst>
           </p:cNvPr>
@@ -803,7 +791,7 @@
           <p:cNvPr id="3" name="Content Placeholder 2">
             <a:extLst>
               <a:ext uri="{FF2B5EF4-FFF2-40B4-BE49-F238E27FC236}">
-                <a16:creationId xmlns:a16="http://schemas.microsoft.com/office/drawing/2014/main" id="{690587F3-4E51-485F-FFA2-56C01B5AB369}"/>
+                <a16:creationId xmlns:a16="http://schemas.microsoft.com/office/drawing/2014/main" id="{594C4E6E-B80C-A210-21B5-565B7EE07EA2}"/>
               </a:ext>
             </a:extLst>
           </p:cNvPr>
@@ -860,7 +848,7 @@
           <p:cNvPr id="4" name="Date Placeholder 3">
             <a:extLst>
               <a:ext uri="{FF2B5EF4-FFF2-40B4-BE49-F238E27FC236}">
-                <a16:creationId xmlns:a16="http://schemas.microsoft.com/office/drawing/2014/main" id="{4D8825D9-7AD7-5C28-654E-88985BFE0F8F}"/>
+                <a16:creationId xmlns:a16="http://schemas.microsoft.com/office/drawing/2014/main" id="{3DF7AF2A-48A1-376D-91AA-3689AC8FA007}"/>
               </a:ext>
             </a:extLst>
           </p:cNvPr>
@@ -876,9 +864,9 @@
           <a:bodyPr/>
           <a:lstStyle/>
           <a:p>
-            <a:fld id="{62062B16-6337-4A67-9E89-A0A4A3D21F2F}" type="datetimeFigureOut">
+            <a:fld id="{3517CA85-81D0-4CB8-8648-C6526E64953F}" type="datetimeFigureOut">
               <a:rPr lang="en-US" smtClean="0"/>
-              <a:t>8/21/2025</a:t>
+              <a:t>8/27/2025</a:t>
             </a:fld>
             <a:endParaRPr lang="en-US"/>
           </a:p>
@@ -889,7 +877,7 @@
           <p:cNvPr id="5" name="Footer Placeholder 4">
             <a:extLst>
               <a:ext uri="{FF2B5EF4-FFF2-40B4-BE49-F238E27FC236}">
-                <a16:creationId xmlns:a16="http://schemas.microsoft.com/office/drawing/2014/main" id="{6AB4EFA8-C86B-2641-D72B-630422E2CE03}"/>
+                <a16:creationId xmlns:a16="http://schemas.microsoft.com/office/drawing/2014/main" id="{152C853D-C731-F398-980F-337FA11EF218}"/>
               </a:ext>
             </a:extLst>
           </p:cNvPr>
@@ -914,7 +902,7 @@
           <p:cNvPr id="6" name="Slide Number Placeholder 5">
             <a:extLst>
               <a:ext uri="{FF2B5EF4-FFF2-40B4-BE49-F238E27FC236}">
-                <a16:creationId xmlns:a16="http://schemas.microsoft.com/office/drawing/2014/main" id="{5A7B7489-FE6D-5FF9-D2E2-B7577C8F2C85}"/>
+                <a16:creationId xmlns:a16="http://schemas.microsoft.com/office/drawing/2014/main" id="{39146243-51BB-83F5-F484-296FFFE6861C}"/>
               </a:ext>
             </a:extLst>
           </p:cNvPr>
@@ -930,7 +918,7 @@
           <a:bodyPr/>
           <a:lstStyle/>
           <a:p>
-            <a:fld id="{5826882B-EDEA-49F1-86AC-CF7DFB1A306D}" type="slidenum">
+            <a:fld id="{9A8414FD-6C3B-4210-8B74-01572F04427B}" type="slidenum">
               <a:rPr lang="en-US" smtClean="0"/>
               <a:t>‹#›</a:t>
             </a:fld>
@@ -941,7 +929,7 @@
     </p:spTree>
     <p:extLst>
       <p:ext uri="{BB962C8B-B14F-4D97-AF65-F5344CB8AC3E}">
-        <p14:creationId xmlns:p14="http://schemas.microsoft.com/office/powerpoint/2010/main" val="3365961066"/>
+        <p14:creationId xmlns:p14="http://schemas.microsoft.com/office/powerpoint/2010/main" val="539930298"/>
       </p:ext>
     </p:extLst>
   </p:cSld>
@@ -973,7 +961,7 @@
           <p:cNvPr id="2" name="Title 1">
             <a:extLst>
               <a:ext uri="{FF2B5EF4-FFF2-40B4-BE49-F238E27FC236}">
-                <a16:creationId xmlns:a16="http://schemas.microsoft.com/office/drawing/2014/main" id="{10324D5C-3FDB-2978-C91E-4621CB926B5C}"/>
+                <a16:creationId xmlns:a16="http://schemas.microsoft.com/office/drawing/2014/main" id="{1BC24588-3206-D6BC-08FB-21B042711BD5}"/>
               </a:ext>
             </a:extLst>
           </p:cNvPr>
@@ -1010,7 +998,7 @@
           <p:cNvPr id="3" name="Text Placeholder 2">
             <a:extLst>
               <a:ext uri="{FF2B5EF4-FFF2-40B4-BE49-F238E27FC236}">
-                <a16:creationId xmlns:a16="http://schemas.microsoft.com/office/drawing/2014/main" id="{FEF93739-66C6-5BFD-2400-2F03A81036F8}"/>
+                <a16:creationId xmlns:a16="http://schemas.microsoft.com/office/drawing/2014/main" id="{D718C2F8-4DB4-4C0D-0E29-65D5ABCDCD40}"/>
               </a:ext>
             </a:extLst>
           </p:cNvPr>
@@ -1135,7 +1123,7 @@
           <p:cNvPr id="4" name="Date Placeholder 3">
             <a:extLst>
               <a:ext uri="{FF2B5EF4-FFF2-40B4-BE49-F238E27FC236}">
-                <a16:creationId xmlns:a16="http://schemas.microsoft.com/office/drawing/2014/main" id="{1FEB0286-9900-0FA6-6654-6D68879C77D3}"/>
+                <a16:creationId xmlns:a16="http://schemas.microsoft.com/office/drawing/2014/main" id="{0C5F7666-386C-5B8D-C872-EA3BB9794671}"/>
               </a:ext>
             </a:extLst>
           </p:cNvPr>
@@ -1151,9 +1139,9 @@
           <a:bodyPr/>
           <a:lstStyle/>
           <a:p>
-            <a:fld id="{62062B16-6337-4A67-9E89-A0A4A3D21F2F}" type="datetimeFigureOut">
+            <a:fld id="{3517CA85-81D0-4CB8-8648-C6526E64953F}" type="datetimeFigureOut">
               <a:rPr lang="en-US" smtClean="0"/>
-              <a:t>8/21/2025</a:t>
+              <a:t>8/27/2025</a:t>
             </a:fld>
             <a:endParaRPr lang="en-US"/>
           </a:p>
@@ -1164,7 +1152,7 @@
           <p:cNvPr id="5" name="Footer Placeholder 4">
             <a:extLst>
               <a:ext uri="{FF2B5EF4-FFF2-40B4-BE49-F238E27FC236}">
-                <a16:creationId xmlns:a16="http://schemas.microsoft.com/office/drawing/2014/main" id="{BFD01CC9-E881-2BB8-14B7-8A3CD9F4F75E}"/>
+                <a16:creationId xmlns:a16="http://schemas.microsoft.com/office/drawing/2014/main" id="{DF151F4F-D748-7F04-8484-1A07EF366B7A}"/>
               </a:ext>
             </a:extLst>
           </p:cNvPr>
@@ -1189,7 +1177,7 @@
           <p:cNvPr id="6" name="Slide Number Placeholder 5">
             <a:extLst>
               <a:ext uri="{FF2B5EF4-FFF2-40B4-BE49-F238E27FC236}">
-                <a16:creationId xmlns:a16="http://schemas.microsoft.com/office/drawing/2014/main" id="{38E7C09C-2AD7-49F3-4EA1-8F8C191BA3C0}"/>
+                <a16:creationId xmlns:a16="http://schemas.microsoft.com/office/drawing/2014/main" id="{FA92305E-E366-9CCC-947D-1CEAA86C3E4E}"/>
               </a:ext>
             </a:extLst>
           </p:cNvPr>
@@ -1205,7 +1193,7 @@
           <a:bodyPr/>
           <a:lstStyle/>
           <a:p>
-            <a:fld id="{5826882B-EDEA-49F1-86AC-CF7DFB1A306D}" type="slidenum">
+            <a:fld id="{9A8414FD-6C3B-4210-8B74-01572F04427B}" type="slidenum">
               <a:rPr lang="en-US" smtClean="0"/>
               <a:t>‹#›</a:t>
             </a:fld>
@@ -1216,7 +1204,7 @@
     </p:spTree>
     <p:extLst>
       <p:ext uri="{BB962C8B-B14F-4D97-AF65-F5344CB8AC3E}">
-        <p14:creationId xmlns:p14="http://schemas.microsoft.com/office/powerpoint/2010/main" val="942240599"/>
+        <p14:creationId xmlns:p14="http://schemas.microsoft.com/office/powerpoint/2010/main" val="233407786"/>
       </p:ext>
     </p:extLst>
   </p:cSld>
@@ -1248,7 +1236,7 @@
           <p:cNvPr id="2" name="Title 1">
             <a:extLst>
               <a:ext uri="{FF2B5EF4-FFF2-40B4-BE49-F238E27FC236}">
-                <a16:creationId xmlns:a16="http://schemas.microsoft.com/office/drawing/2014/main" id="{CB3C7F95-1F22-1C0C-8AE3-0B6F0181FEC7}"/>
+                <a16:creationId xmlns:a16="http://schemas.microsoft.com/office/drawing/2014/main" id="{106C2C5E-C66C-D9F4-E15F-5C20D829B52A}"/>
               </a:ext>
             </a:extLst>
           </p:cNvPr>
@@ -1276,7 +1264,7 @@
           <p:cNvPr id="3" name="Content Placeholder 2">
             <a:extLst>
               <a:ext uri="{FF2B5EF4-FFF2-40B4-BE49-F238E27FC236}">
-                <a16:creationId xmlns:a16="http://schemas.microsoft.com/office/drawing/2014/main" id="{626AEDF7-3003-2062-56C0-A5C3AEB92E43}"/>
+                <a16:creationId xmlns:a16="http://schemas.microsoft.com/office/drawing/2014/main" id="{0AB8A7A0-2BCD-EF1E-888B-78CC946C7BED}"/>
               </a:ext>
             </a:extLst>
           </p:cNvPr>
@@ -1338,7 +1326,7 @@
           <p:cNvPr id="4" name="Content Placeholder 3">
             <a:extLst>
               <a:ext uri="{FF2B5EF4-FFF2-40B4-BE49-F238E27FC236}">
-                <a16:creationId xmlns:a16="http://schemas.microsoft.com/office/drawing/2014/main" id="{06F0064F-EFA0-A19B-EFE8-F1A0CFE5FE85}"/>
+                <a16:creationId xmlns:a16="http://schemas.microsoft.com/office/drawing/2014/main" id="{38D5CBDE-D872-C497-1327-15EC35782288}"/>
               </a:ext>
             </a:extLst>
           </p:cNvPr>
@@ -1400,7 +1388,7 @@
           <p:cNvPr id="5" name="Date Placeholder 4">
             <a:extLst>
               <a:ext uri="{FF2B5EF4-FFF2-40B4-BE49-F238E27FC236}">
-                <a16:creationId xmlns:a16="http://schemas.microsoft.com/office/drawing/2014/main" id="{D29ABDF8-3183-5071-2F95-EB350DBB975A}"/>
+                <a16:creationId xmlns:a16="http://schemas.microsoft.com/office/drawing/2014/main" id="{D4F329D5-D0C4-87E8-64D6-B954AA5B2FED}"/>
               </a:ext>
             </a:extLst>
           </p:cNvPr>
@@ -1416,9 +1404,9 @@
           <a:bodyPr/>
           <a:lstStyle/>
           <a:p>
-            <a:fld id="{62062B16-6337-4A67-9E89-A0A4A3D21F2F}" type="datetimeFigureOut">
+            <a:fld id="{3517CA85-81D0-4CB8-8648-C6526E64953F}" type="datetimeFigureOut">
               <a:rPr lang="en-US" smtClean="0"/>
-              <a:t>8/21/2025</a:t>
+              <a:t>8/27/2025</a:t>
             </a:fld>
             <a:endParaRPr lang="en-US"/>
           </a:p>
@@ -1429,7 +1417,7 @@
           <p:cNvPr id="6" name="Footer Placeholder 5">
             <a:extLst>
               <a:ext uri="{FF2B5EF4-FFF2-40B4-BE49-F238E27FC236}">
-                <a16:creationId xmlns:a16="http://schemas.microsoft.com/office/drawing/2014/main" id="{7E2E1651-E54D-F28B-4D22-8299E3EE717B}"/>
+                <a16:creationId xmlns:a16="http://schemas.microsoft.com/office/drawing/2014/main" id="{6C989CF1-C173-68E5-054B-C12ED9668D3C}"/>
               </a:ext>
             </a:extLst>
           </p:cNvPr>
@@ -1454,7 +1442,7 @@
           <p:cNvPr id="7" name="Slide Number Placeholder 6">
             <a:extLst>
               <a:ext uri="{FF2B5EF4-FFF2-40B4-BE49-F238E27FC236}">
-                <a16:creationId xmlns:a16="http://schemas.microsoft.com/office/drawing/2014/main" id="{829AB203-08E4-F690-8CD1-5EAE1965444F}"/>
+                <a16:creationId xmlns:a16="http://schemas.microsoft.com/office/drawing/2014/main" id="{2008EEF0-43BE-1D86-5765-50BC943C973F}"/>
               </a:ext>
             </a:extLst>
           </p:cNvPr>
@@ -1470,7 +1458,7 @@
           <a:bodyPr/>
           <a:lstStyle/>
           <a:p>
-            <a:fld id="{5826882B-EDEA-49F1-86AC-CF7DFB1A306D}" type="slidenum">
+            <a:fld id="{9A8414FD-6C3B-4210-8B74-01572F04427B}" type="slidenum">
               <a:rPr lang="en-US" smtClean="0"/>
               <a:t>‹#›</a:t>
             </a:fld>
@@ -1481,7 +1469,7 @@
     </p:spTree>
     <p:extLst>
       <p:ext uri="{BB962C8B-B14F-4D97-AF65-F5344CB8AC3E}">
-        <p14:creationId xmlns:p14="http://schemas.microsoft.com/office/powerpoint/2010/main" val="1000302710"/>
+        <p14:creationId xmlns:p14="http://schemas.microsoft.com/office/powerpoint/2010/main" val="4101320536"/>
       </p:ext>
     </p:extLst>
   </p:cSld>
@@ -1513,7 +1501,7 @@
           <p:cNvPr id="2" name="Title 1">
             <a:extLst>
               <a:ext uri="{FF2B5EF4-FFF2-40B4-BE49-F238E27FC236}">
-                <a16:creationId xmlns:a16="http://schemas.microsoft.com/office/drawing/2014/main" id="{F2D37FEE-1033-AB37-54DA-147B2ABDC3FE}"/>
+                <a16:creationId xmlns:a16="http://schemas.microsoft.com/office/drawing/2014/main" id="{D67729C5-468C-9596-53CD-8E1DEB090F04}"/>
               </a:ext>
             </a:extLst>
           </p:cNvPr>
@@ -1546,7 +1534,7 @@
           <p:cNvPr id="3" name="Text Placeholder 2">
             <a:extLst>
               <a:ext uri="{FF2B5EF4-FFF2-40B4-BE49-F238E27FC236}">
-                <a16:creationId xmlns:a16="http://schemas.microsoft.com/office/drawing/2014/main" id="{CC041AF5-29A2-D4A7-0C13-405F0C1EB37B}"/>
+                <a16:creationId xmlns:a16="http://schemas.microsoft.com/office/drawing/2014/main" id="{6FC52DB6-6FBF-0F71-2D09-0347C6CC0476}"/>
               </a:ext>
             </a:extLst>
           </p:cNvPr>
@@ -1617,7 +1605,7 @@
           <p:cNvPr id="4" name="Content Placeholder 3">
             <a:extLst>
               <a:ext uri="{FF2B5EF4-FFF2-40B4-BE49-F238E27FC236}">
-                <a16:creationId xmlns:a16="http://schemas.microsoft.com/office/drawing/2014/main" id="{D1E6FB3A-483F-F1AB-CC48-54C7AC8F314C}"/>
+                <a16:creationId xmlns:a16="http://schemas.microsoft.com/office/drawing/2014/main" id="{59C36BE1-F38D-EB34-CEA7-C53E8DED4304}"/>
               </a:ext>
             </a:extLst>
           </p:cNvPr>
@@ -1679,7 +1667,7 @@
           <p:cNvPr id="5" name="Text Placeholder 4">
             <a:extLst>
               <a:ext uri="{FF2B5EF4-FFF2-40B4-BE49-F238E27FC236}">
-                <a16:creationId xmlns:a16="http://schemas.microsoft.com/office/drawing/2014/main" id="{6FFCAAB2-6231-ACE6-4704-897F34193D75}"/>
+                <a16:creationId xmlns:a16="http://schemas.microsoft.com/office/drawing/2014/main" id="{9926BDF1-13E0-8042-D84D-46BDEEC0EB98}"/>
               </a:ext>
             </a:extLst>
           </p:cNvPr>
@@ -1750,7 +1738,7 @@
           <p:cNvPr id="6" name="Content Placeholder 5">
             <a:extLst>
               <a:ext uri="{FF2B5EF4-FFF2-40B4-BE49-F238E27FC236}">
-                <a16:creationId xmlns:a16="http://schemas.microsoft.com/office/drawing/2014/main" id="{0A964CE3-5378-1275-7550-DD876B9C8511}"/>
+                <a16:creationId xmlns:a16="http://schemas.microsoft.com/office/drawing/2014/main" id="{1828A445-9E7B-8215-A5B1-A4D948531317}"/>
               </a:ext>
             </a:extLst>
           </p:cNvPr>
@@ -1812,7 +1800,7 @@
           <p:cNvPr id="7" name="Date Placeholder 6">
             <a:extLst>
               <a:ext uri="{FF2B5EF4-FFF2-40B4-BE49-F238E27FC236}">
-                <a16:creationId xmlns:a16="http://schemas.microsoft.com/office/drawing/2014/main" id="{D6312E2E-D8B6-3784-03D4-238A2603631F}"/>
+                <a16:creationId xmlns:a16="http://schemas.microsoft.com/office/drawing/2014/main" id="{A51BDE21-E833-8BEF-7A8A-E2C6120805A2}"/>
               </a:ext>
             </a:extLst>
           </p:cNvPr>
@@ -1828,9 +1816,9 @@
           <a:bodyPr/>
           <a:lstStyle/>
           <a:p>
-            <a:fld id="{62062B16-6337-4A67-9E89-A0A4A3D21F2F}" type="datetimeFigureOut">
+            <a:fld id="{3517CA85-81D0-4CB8-8648-C6526E64953F}" type="datetimeFigureOut">
               <a:rPr lang="en-US" smtClean="0"/>
-              <a:t>8/21/2025</a:t>
+              <a:t>8/27/2025</a:t>
             </a:fld>
             <a:endParaRPr lang="en-US"/>
           </a:p>
@@ -1841,7 +1829,7 @@
           <p:cNvPr id="8" name="Footer Placeholder 7">
             <a:extLst>
               <a:ext uri="{FF2B5EF4-FFF2-40B4-BE49-F238E27FC236}">
-                <a16:creationId xmlns:a16="http://schemas.microsoft.com/office/drawing/2014/main" id="{6A393119-4255-43FC-B7C9-44C422E4A19C}"/>
+                <a16:creationId xmlns:a16="http://schemas.microsoft.com/office/drawing/2014/main" id="{64AE8AC7-ABBE-3702-D673-4C7AA945DE37}"/>
               </a:ext>
             </a:extLst>
           </p:cNvPr>
@@ -1866,7 +1854,7 @@
           <p:cNvPr id="9" name="Slide Number Placeholder 8">
             <a:extLst>
               <a:ext uri="{FF2B5EF4-FFF2-40B4-BE49-F238E27FC236}">
-                <a16:creationId xmlns:a16="http://schemas.microsoft.com/office/drawing/2014/main" id="{C2972286-2F32-F1AF-48ED-489EAC90DBFE}"/>
+                <a16:creationId xmlns:a16="http://schemas.microsoft.com/office/drawing/2014/main" id="{6F5E7843-25A3-5648-0655-896D9556A1EB}"/>
               </a:ext>
             </a:extLst>
           </p:cNvPr>
@@ -1882,7 +1870,7 @@
           <a:bodyPr/>
           <a:lstStyle/>
           <a:p>
-            <a:fld id="{5826882B-EDEA-49F1-86AC-CF7DFB1A306D}" type="slidenum">
+            <a:fld id="{9A8414FD-6C3B-4210-8B74-01572F04427B}" type="slidenum">
               <a:rPr lang="en-US" smtClean="0"/>
               <a:t>‹#›</a:t>
             </a:fld>
@@ -1893,7 +1881,7 @@
     </p:spTree>
     <p:extLst>
       <p:ext uri="{BB962C8B-B14F-4D97-AF65-F5344CB8AC3E}">
-        <p14:creationId xmlns:p14="http://schemas.microsoft.com/office/powerpoint/2010/main" val="1857570442"/>
+        <p14:creationId xmlns:p14="http://schemas.microsoft.com/office/powerpoint/2010/main" val="4107550648"/>
       </p:ext>
     </p:extLst>
   </p:cSld>
@@ -1925,7 +1913,7 @@
           <p:cNvPr id="2" name="Title 1">
             <a:extLst>
               <a:ext uri="{FF2B5EF4-FFF2-40B4-BE49-F238E27FC236}">
-                <a16:creationId xmlns:a16="http://schemas.microsoft.com/office/drawing/2014/main" id="{8B1C52BB-B9BB-2C10-24AD-AAF196F8290A}"/>
+                <a16:creationId xmlns:a16="http://schemas.microsoft.com/office/drawing/2014/main" id="{139C087E-2241-E823-F5A3-5C29A0C56927}"/>
               </a:ext>
             </a:extLst>
           </p:cNvPr>
@@ -1953,7 +1941,7 @@
           <p:cNvPr id="3" name="Date Placeholder 2">
             <a:extLst>
               <a:ext uri="{FF2B5EF4-FFF2-40B4-BE49-F238E27FC236}">
-                <a16:creationId xmlns:a16="http://schemas.microsoft.com/office/drawing/2014/main" id="{8EDFBE7D-D3EA-81F9-189C-84DBE8137EDC}"/>
+                <a16:creationId xmlns:a16="http://schemas.microsoft.com/office/drawing/2014/main" id="{D370D59D-3C4F-4F15-7538-3667E3CE3C02}"/>
               </a:ext>
             </a:extLst>
           </p:cNvPr>
@@ -1969,9 +1957,9 @@
           <a:bodyPr/>
           <a:lstStyle/>
           <a:p>
-            <a:fld id="{62062B16-6337-4A67-9E89-A0A4A3D21F2F}" type="datetimeFigureOut">
+            <a:fld id="{3517CA85-81D0-4CB8-8648-C6526E64953F}" type="datetimeFigureOut">
               <a:rPr lang="en-US" smtClean="0"/>
-              <a:t>8/21/2025</a:t>
+              <a:t>8/27/2025</a:t>
             </a:fld>
             <a:endParaRPr lang="en-US"/>
           </a:p>
@@ -1982,7 +1970,7 @@
           <p:cNvPr id="4" name="Footer Placeholder 3">
             <a:extLst>
               <a:ext uri="{FF2B5EF4-FFF2-40B4-BE49-F238E27FC236}">
-                <a16:creationId xmlns:a16="http://schemas.microsoft.com/office/drawing/2014/main" id="{B64DD60C-C108-3F42-7270-8717B2E255DE}"/>
+                <a16:creationId xmlns:a16="http://schemas.microsoft.com/office/drawing/2014/main" id="{4D0D9080-E9D4-3604-417F-771A2A918D61}"/>
               </a:ext>
             </a:extLst>
           </p:cNvPr>
@@ -2007,7 +1995,7 @@
           <p:cNvPr id="5" name="Slide Number Placeholder 4">
             <a:extLst>
               <a:ext uri="{FF2B5EF4-FFF2-40B4-BE49-F238E27FC236}">
-                <a16:creationId xmlns:a16="http://schemas.microsoft.com/office/drawing/2014/main" id="{BDD95999-B39F-B162-51B8-FCB5F37904CA}"/>
+                <a16:creationId xmlns:a16="http://schemas.microsoft.com/office/drawing/2014/main" id="{CAF4821D-DF56-5973-A03E-55E2024DAA87}"/>
               </a:ext>
             </a:extLst>
           </p:cNvPr>
@@ -2023,7 +2011,7 @@
           <a:bodyPr/>
           <a:lstStyle/>
           <a:p>
-            <a:fld id="{5826882B-EDEA-49F1-86AC-CF7DFB1A306D}" type="slidenum">
+            <a:fld id="{9A8414FD-6C3B-4210-8B74-01572F04427B}" type="slidenum">
               <a:rPr lang="en-US" smtClean="0"/>
               <a:t>‹#›</a:t>
             </a:fld>
@@ -2034,7 +2022,7 @@
     </p:spTree>
     <p:extLst>
       <p:ext uri="{BB962C8B-B14F-4D97-AF65-F5344CB8AC3E}">
-        <p14:creationId xmlns:p14="http://schemas.microsoft.com/office/powerpoint/2010/main" val="1472721074"/>
+        <p14:creationId xmlns:p14="http://schemas.microsoft.com/office/powerpoint/2010/main" val="142735625"/>
       </p:ext>
     </p:extLst>
   </p:cSld>
@@ -2066,7 +2054,7 @@
           <p:cNvPr id="2" name="Date Placeholder 1">
             <a:extLst>
               <a:ext uri="{FF2B5EF4-FFF2-40B4-BE49-F238E27FC236}">
-                <a16:creationId xmlns:a16="http://schemas.microsoft.com/office/drawing/2014/main" id="{DD69D126-8D0E-59FB-A7B6-78BCBF626364}"/>
+                <a16:creationId xmlns:a16="http://schemas.microsoft.com/office/drawing/2014/main" id="{491F287F-230E-CF6B-D922-5772E8CF5271}"/>
               </a:ext>
             </a:extLst>
           </p:cNvPr>
@@ -2082,9 +2070,9 @@
           <a:bodyPr/>
           <a:lstStyle/>
           <a:p>
-            <a:fld id="{62062B16-6337-4A67-9E89-A0A4A3D21F2F}" type="datetimeFigureOut">
+            <a:fld id="{3517CA85-81D0-4CB8-8648-C6526E64953F}" type="datetimeFigureOut">
               <a:rPr lang="en-US" smtClean="0"/>
-              <a:t>8/21/2025</a:t>
+              <a:t>8/27/2025</a:t>
             </a:fld>
             <a:endParaRPr lang="en-US"/>
           </a:p>
@@ -2095,7 +2083,7 @@
           <p:cNvPr id="3" name="Footer Placeholder 2">
             <a:extLst>
               <a:ext uri="{FF2B5EF4-FFF2-40B4-BE49-F238E27FC236}">
-                <a16:creationId xmlns:a16="http://schemas.microsoft.com/office/drawing/2014/main" id="{6DA044D5-6B3A-5F26-C7B9-C4D252ED36E4}"/>
+                <a16:creationId xmlns:a16="http://schemas.microsoft.com/office/drawing/2014/main" id="{24030CD0-9793-EABE-A951-D667286D6C26}"/>
               </a:ext>
             </a:extLst>
           </p:cNvPr>
@@ -2120,7 +2108,7 @@
           <p:cNvPr id="4" name="Slide Number Placeholder 3">
             <a:extLst>
               <a:ext uri="{FF2B5EF4-FFF2-40B4-BE49-F238E27FC236}">
-                <a16:creationId xmlns:a16="http://schemas.microsoft.com/office/drawing/2014/main" id="{E9F61D39-4410-A4D8-182D-A8E84355E599}"/>
+                <a16:creationId xmlns:a16="http://schemas.microsoft.com/office/drawing/2014/main" id="{087D041E-1F83-9977-259C-EFA2A02A5517}"/>
               </a:ext>
             </a:extLst>
           </p:cNvPr>
@@ -2136,7 +2124,7 @@
           <a:bodyPr/>
           <a:lstStyle/>
           <a:p>
-            <a:fld id="{5826882B-EDEA-49F1-86AC-CF7DFB1A306D}" type="slidenum">
+            <a:fld id="{9A8414FD-6C3B-4210-8B74-01572F04427B}" type="slidenum">
               <a:rPr lang="en-US" smtClean="0"/>
               <a:t>‹#›</a:t>
             </a:fld>
@@ -2147,7 +2135,7 @@
     </p:spTree>
     <p:extLst>
       <p:ext uri="{BB962C8B-B14F-4D97-AF65-F5344CB8AC3E}">
-        <p14:creationId xmlns:p14="http://schemas.microsoft.com/office/powerpoint/2010/main" val="3954809918"/>
+        <p14:creationId xmlns:p14="http://schemas.microsoft.com/office/powerpoint/2010/main" val="4001873817"/>
       </p:ext>
     </p:extLst>
   </p:cSld>
@@ -2179,7 +2167,7 @@
           <p:cNvPr id="2" name="Title 1">
             <a:extLst>
               <a:ext uri="{FF2B5EF4-FFF2-40B4-BE49-F238E27FC236}">
-                <a16:creationId xmlns:a16="http://schemas.microsoft.com/office/drawing/2014/main" id="{0A90F92E-F1E5-1CD4-1F1F-360A46C8BD68}"/>
+                <a16:creationId xmlns:a16="http://schemas.microsoft.com/office/drawing/2014/main" id="{BADAB7F9-BF62-895C-5C0F-C85E61B7A76F}"/>
               </a:ext>
             </a:extLst>
           </p:cNvPr>
@@ -2216,7 +2204,7 @@
           <p:cNvPr id="3" name="Content Placeholder 2">
             <a:extLst>
               <a:ext uri="{FF2B5EF4-FFF2-40B4-BE49-F238E27FC236}">
-                <a16:creationId xmlns:a16="http://schemas.microsoft.com/office/drawing/2014/main" id="{FF58EE0D-C20E-9077-C703-4ED8F9CDF1F1}"/>
+                <a16:creationId xmlns:a16="http://schemas.microsoft.com/office/drawing/2014/main" id="{E8286AA0-216D-4B17-2336-936A36C9D023}"/>
               </a:ext>
             </a:extLst>
           </p:cNvPr>
@@ -2306,7 +2294,7 @@
           <p:cNvPr id="4" name="Text Placeholder 3">
             <a:extLst>
               <a:ext uri="{FF2B5EF4-FFF2-40B4-BE49-F238E27FC236}">
-                <a16:creationId xmlns:a16="http://schemas.microsoft.com/office/drawing/2014/main" id="{F40F3D61-739C-D470-2FB1-EA5A2B756337}"/>
+                <a16:creationId xmlns:a16="http://schemas.microsoft.com/office/drawing/2014/main" id="{3D761759-65F2-1B73-404E-4170F1BCED5F}"/>
               </a:ext>
             </a:extLst>
           </p:cNvPr>
@@ -2377,7 +2365,7 @@
           <p:cNvPr id="5" name="Date Placeholder 4">
             <a:extLst>
               <a:ext uri="{FF2B5EF4-FFF2-40B4-BE49-F238E27FC236}">
-                <a16:creationId xmlns:a16="http://schemas.microsoft.com/office/drawing/2014/main" id="{AB1F18C6-6E9F-1B17-7852-F163C5452C1D}"/>
+                <a16:creationId xmlns:a16="http://schemas.microsoft.com/office/drawing/2014/main" id="{098E50AD-9556-2001-F4D5-D10E07EF32E9}"/>
               </a:ext>
             </a:extLst>
           </p:cNvPr>
@@ -2393,9 +2381,9 @@
           <a:bodyPr/>
           <a:lstStyle/>
           <a:p>
-            <a:fld id="{62062B16-6337-4A67-9E89-A0A4A3D21F2F}" type="datetimeFigureOut">
+            <a:fld id="{3517CA85-81D0-4CB8-8648-C6526E64953F}" type="datetimeFigureOut">
               <a:rPr lang="en-US" smtClean="0"/>
-              <a:t>8/21/2025</a:t>
+              <a:t>8/27/2025</a:t>
             </a:fld>
             <a:endParaRPr lang="en-US"/>
           </a:p>
@@ -2406,7 +2394,7 @@
           <p:cNvPr id="6" name="Footer Placeholder 5">
             <a:extLst>
               <a:ext uri="{FF2B5EF4-FFF2-40B4-BE49-F238E27FC236}">
-                <a16:creationId xmlns:a16="http://schemas.microsoft.com/office/drawing/2014/main" id="{718B03E6-0B6E-C69B-75A0-2DE5EF3E1B4C}"/>
+                <a16:creationId xmlns:a16="http://schemas.microsoft.com/office/drawing/2014/main" id="{F2CFC052-E2BE-E910-18AE-384CAF1E69D5}"/>
               </a:ext>
             </a:extLst>
           </p:cNvPr>
@@ -2431,7 +2419,7 @@
           <p:cNvPr id="7" name="Slide Number Placeholder 6">
             <a:extLst>
               <a:ext uri="{FF2B5EF4-FFF2-40B4-BE49-F238E27FC236}">
-                <a16:creationId xmlns:a16="http://schemas.microsoft.com/office/drawing/2014/main" id="{E51A3100-029E-FF6C-798C-D4DDF8617391}"/>
+                <a16:creationId xmlns:a16="http://schemas.microsoft.com/office/drawing/2014/main" id="{E75E0D79-333F-FE67-8553-5C133BEC014E}"/>
               </a:ext>
             </a:extLst>
           </p:cNvPr>
@@ -2447,7 +2435,7 @@
           <a:bodyPr/>
           <a:lstStyle/>
           <a:p>
-            <a:fld id="{5826882B-EDEA-49F1-86AC-CF7DFB1A306D}" type="slidenum">
+            <a:fld id="{9A8414FD-6C3B-4210-8B74-01572F04427B}" type="slidenum">
               <a:rPr lang="en-US" smtClean="0"/>
               <a:t>‹#›</a:t>
             </a:fld>
@@ -2458,7 +2446,7 @@
     </p:spTree>
     <p:extLst>
       <p:ext uri="{BB962C8B-B14F-4D97-AF65-F5344CB8AC3E}">
-        <p14:creationId xmlns:p14="http://schemas.microsoft.com/office/powerpoint/2010/main" val="1454429837"/>
+        <p14:creationId xmlns:p14="http://schemas.microsoft.com/office/powerpoint/2010/main" val="2951029487"/>
       </p:ext>
     </p:extLst>
   </p:cSld>
@@ -2490,7 +2478,7 @@
           <p:cNvPr id="2" name="Title 1">
             <a:extLst>
               <a:ext uri="{FF2B5EF4-FFF2-40B4-BE49-F238E27FC236}">
-                <a16:creationId xmlns:a16="http://schemas.microsoft.com/office/drawing/2014/main" id="{B2A127FC-ABA0-267A-A20B-59D07E7C32EC}"/>
+                <a16:creationId xmlns:a16="http://schemas.microsoft.com/office/drawing/2014/main" id="{80962B5D-D16E-A64D-B3BE-2101D805F428}"/>
               </a:ext>
             </a:extLst>
           </p:cNvPr>
@@ -2527,7 +2515,7 @@
           <p:cNvPr id="3" name="Picture Placeholder 2">
             <a:extLst>
               <a:ext uri="{FF2B5EF4-FFF2-40B4-BE49-F238E27FC236}">
-                <a16:creationId xmlns:a16="http://schemas.microsoft.com/office/drawing/2014/main" id="{09B42EAE-B72E-2D8E-8FFD-1BE4F278252F}"/>
+                <a16:creationId xmlns:a16="http://schemas.microsoft.com/office/drawing/2014/main" id="{14D43E71-09D3-76DE-D308-D6BB699E3F94}"/>
               </a:ext>
             </a:extLst>
           </p:cNvPr>
@@ -2594,7 +2582,7 @@
           <p:cNvPr id="4" name="Text Placeholder 3">
             <a:extLst>
               <a:ext uri="{FF2B5EF4-FFF2-40B4-BE49-F238E27FC236}">
-                <a16:creationId xmlns:a16="http://schemas.microsoft.com/office/drawing/2014/main" id="{F95F50DA-0BE9-AA13-D8D1-EB0D71992784}"/>
+                <a16:creationId xmlns:a16="http://schemas.microsoft.com/office/drawing/2014/main" id="{9E45138B-4C40-7AF4-300A-B97D87B7D611}"/>
               </a:ext>
             </a:extLst>
           </p:cNvPr>
@@ -2665,7 +2653,7 @@
           <p:cNvPr id="5" name="Date Placeholder 4">
             <a:extLst>
               <a:ext uri="{FF2B5EF4-FFF2-40B4-BE49-F238E27FC236}">
-                <a16:creationId xmlns:a16="http://schemas.microsoft.com/office/drawing/2014/main" id="{9CEA3604-3A88-BBD4-F8C0-2CF4EDA05BE5}"/>
+                <a16:creationId xmlns:a16="http://schemas.microsoft.com/office/drawing/2014/main" id="{BB67F55F-E59F-4B0F-7980-599BD84C88E5}"/>
               </a:ext>
             </a:extLst>
           </p:cNvPr>
@@ -2681,9 +2669,9 @@
           <a:bodyPr/>
           <a:lstStyle/>
           <a:p>
-            <a:fld id="{62062B16-6337-4A67-9E89-A0A4A3D21F2F}" type="datetimeFigureOut">
+            <a:fld id="{3517CA85-81D0-4CB8-8648-C6526E64953F}" type="datetimeFigureOut">
               <a:rPr lang="en-US" smtClean="0"/>
-              <a:t>8/21/2025</a:t>
+              <a:t>8/27/2025</a:t>
             </a:fld>
             <a:endParaRPr lang="en-US"/>
           </a:p>
@@ -2694,7 +2682,7 @@
           <p:cNvPr id="6" name="Footer Placeholder 5">
             <a:extLst>
               <a:ext uri="{FF2B5EF4-FFF2-40B4-BE49-F238E27FC236}">
-                <a16:creationId xmlns:a16="http://schemas.microsoft.com/office/drawing/2014/main" id="{9A4ECEC4-3468-5BDC-6E45-EC87F9281D21}"/>
+                <a16:creationId xmlns:a16="http://schemas.microsoft.com/office/drawing/2014/main" id="{6711D510-CFD9-4855-F3BF-52B3DFEB95E5}"/>
               </a:ext>
             </a:extLst>
           </p:cNvPr>
@@ -2719,7 +2707,7 @@
           <p:cNvPr id="7" name="Slide Number Placeholder 6">
             <a:extLst>
               <a:ext uri="{FF2B5EF4-FFF2-40B4-BE49-F238E27FC236}">
-                <a16:creationId xmlns:a16="http://schemas.microsoft.com/office/drawing/2014/main" id="{52D943D5-3E1D-E5DD-7E97-0441149D273A}"/>
+                <a16:creationId xmlns:a16="http://schemas.microsoft.com/office/drawing/2014/main" id="{30F13265-FAC3-E1E3-6E05-078F9FEDA061}"/>
               </a:ext>
             </a:extLst>
           </p:cNvPr>
@@ -2735,7 +2723,7 @@
           <a:bodyPr/>
           <a:lstStyle/>
           <a:p>
-            <a:fld id="{5826882B-EDEA-49F1-86AC-CF7DFB1A306D}" type="slidenum">
+            <a:fld id="{9A8414FD-6C3B-4210-8B74-01572F04427B}" type="slidenum">
               <a:rPr lang="en-US" smtClean="0"/>
               <a:t>‹#›</a:t>
             </a:fld>
@@ -2746,7 +2734,7 @@
     </p:spTree>
     <p:extLst>
       <p:ext uri="{BB962C8B-B14F-4D97-AF65-F5344CB8AC3E}">
-        <p14:creationId xmlns:p14="http://schemas.microsoft.com/office/powerpoint/2010/main" val="1316389074"/>
+        <p14:creationId xmlns:p14="http://schemas.microsoft.com/office/powerpoint/2010/main" val="2554769548"/>
       </p:ext>
     </p:extLst>
   </p:cSld>
@@ -2783,7 +2771,7 @@
           <p:cNvPr id="2" name="Title Placeholder 1">
             <a:extLst>
               <a:ext uri="{FF2B5EF4-FFF2-40B4-BE49-F238E27FC236}">
-                <a16:creationId xmlns:a16="http://schemas.microsoft.com/office/drawing/2014/main" id="{F5107EE4-FF66-F1D7-BF85-44EE03509711}"/>
+                <a16:creationId xmlns:a16="http://schemas.microsoft.com/office/drawing/2014/main" id="{84756A29-5133-1815-88B4-546E8FD10C7F}"/>
               </a:ext>
             </a:extLst>
           </p:cNvPr>
@@ -2821,7 +2809,7 @@
           <p:cNvPr id="3" name="Text Placeholder 2">
             <a:extLst>
               <a:ext uri="{FF2B5EF4-FFF2-40B4-BE49-F238E27FC236}">
-                <a16:creationId xmlns:a16="http://schemas.microsoft.com/office/drawing/2014/main" id="{0E1ED9F7-8DFE-B6D9-93C3-5A7989736D52}"/>
+                <a16:creationId xmlns:a16="http://schemas.microsoft.com/office/drawing/2014/main" id="{0251A30C-FFCA-FEBA-D2EA-6DF559F1EC43}"/>
               </a:ext>
             </a:extLst>
           </p:cNvPr>
@@ -2888,7 +2876,7 @@
           <p:cNvPr id="4" name="Date Placeholder 3">
             <a:extLst>
               <a:ext uri="{FF2B5EF4-FFF2-40B4-BE49-F238E27FC236}">
-                <a16:creationId xmlns:a16="http://schemas.microsoft.com/office/drawing/2014/main" id="{C108E92A-D3A1-296D-BF36-CD0AF15E8983}"/>
+                <a16:creationId xmlns:a16="http://schemas.microsoft.com/office/drawing/2014/main" id="{8203334D-F8A2-F4C8-66C5-B41D10E7FC5C}"/>
               </a:ext>
             </a:extLst>
           </p:cNvPr>
@@ -2922,9 +2910,9 @@
             </a:lvl1pPr>
           </a:lstStyle>
           <a:p>
-            <a:fld id="{62062B16-6337-4A67-9E89-A0A4A3D21F2F}" type="datetimeFigureOut">
+            <a:fld id="{3517CA85-81D0-4CB8-8648-C6526E64953F}" type="datetimeFigureOut">
               <a:rPr lang="en-US" smtClean="0"/>
-              <a:t>8/21/2025</a:t>
+              <a:t>8/27/2025</a:t>
             </a:fld>
             <a:endParaRPr lang="en-US"/>
           </a:p>
@@ -2935,7 +2923,7 @@
           <p:cNvPr id="5" name="Footer Placeholder 4">
             <a:extLst>
               <a:ext uri="{FF2B5EF4-FFF2-40B4-BE49-F238E27FC236}">
-                <a16:creationId xmlns:a16="http://schemas.microsoft.com/office/drawing/2014/main" id="{121BF0FF-8FEE-3062-A88D-146D3C4750F0}"/>
+                <a16:creationId xmlns:a16="http://schemas.microsoft.com/office/drawing/2014/main" id="{60840972-3237-7157-35B9-F39A4CE622B3}"/>
               </a:ext>
             </a:extLst>
           </p:cNvPr>
@@ -2978,7 +2966,7 @@
           <p:cNvPr id="6" name="Slide Number Placeholder 5">
             <a:extLst>
               <a:ext uri="{FF2B5EF4-FFF2-40B4-BE49-F238E27FC236}">
-                <a16:creationId xmlns:a16="http://schemas.microsoft.com/office/drawing/2014/main" id="{D44CECA5-2C29-2CC4-CE40-7D3BAFFEAC3C}"/>
+                <a16:creationId xmlns:a16="http://schemas.microsoft.com/office/drawing/2014/main" id="{ECB8001A-0C07-C522-2568-200744071CAF}"/>
               </a:ext>
             </a:extLst>
           </p:cNvPr>
@@ -3012,7 +3000,7 @@
             </a:lvl1pPr>
           </a:lstStyle>
           <a:p>
-            <a:fld id="{5826882B-EDEA-49F1-86AC-CF7DFB1A306D}" type="slidenum">
+            <a:fld id="{9A8414FD-6C3B-4210-8B74-01572F04427B}" type="slidenum">
               <a:rPr lang="en-US" smtClean="0"/>
               <a:t>‹#›</a:t>
             </a:fld>
@@ -3023,7 +3011,7 @@
     </p:spTree>
     <p:extLst>
       <p:ext uri="{BB962C8B-B14F-4D97-AF65-F5344CB8AC3E}">
-        <p14:creationId xmlns:p14="http://schemas.microsoft.com/office/powerpoint/2010/main" val="2278916855"/>
+        <p14:creationId xmlns:p14="http://schemas.microsoft.com/office/powerpoint/2010/main" val="327420132"/>
       </p:ext>
     </p:extLst>
   </p:cSld>
@@ -3346,15 +3334,15 @@
           <p:cNvPr id="2" name="Title 1">
             <a:extLst>
               <a:ext uri="{FF2B5EF4-FFF2-40B4-BE49-F238E27FC236}">
-                <a16:creationId xmlns:a16="http://schemas.microsoft.com/office/drawing/2014/main" id="{87C054C4-3CC4-4140-8CB9-49A38E70CB05}"/>
-              </a:ext>
-            </a:extLst>
-          </p:cNvPr>
-          <p:cNvSpPr>
-            <a:spLocks noGrp="1"/>
-          </p:cNvSpPr>
-          <p:nvPr>
-            <p:ph type="title"/>
+                <a16:creationId xmlns:a16="http://schemas.microsoft.com/office/drawing/2014/main" id="{E3E33643-8849-DA7C-DB27-D8738007DAF3}"/>
+              </a:ext>
+            </a:extLst>
+          </p:cNvPr>
+          <p:cNvSpPr>
+            <a:spLocks noGrp="1"/>
+          </p:cNvSpPr>
+          <p:nvPr>
+            <p:ph type="ctrTitle"/>
           </p:nvPr>
         </p:nvSpPr>
         <p:spPr/>
@@ -3364,7 +3352,59 @@
           <a:p>
             <a:r>
               <a:rPr lang="en-US" dirty="0"/>
-              <a:t>WHOLE DELTA</a:t>
+              <a:t>Water Quality Data Exploration with Lag</a:t>
+            </a:r>
+          </a:p>
+        </p:txBody>
+      </p:sp>
+      <p:sp>
+        <p:nvSpPr>
+          <p:cNvPr id="3" name="Subtitle 2">
+            <a:extLst>
+              <a:ext uri="{FF2B5EF4-FFF2-40B4-BE49-F238E27FC236}">
+                <a16:creationId xmlns:a16="http://schemas.microsoft.com/office/drawing/2014/main" id="{E6A3B0C5-1A48-886C-6DF6-4D7C0D8F4083}"/>
+              </a:ext>
+            </a:extLst>
+          </p:cNvPr>
+          <p:cNvSpPr>
+            <a:spLocks noGrp="1"/>
+          </p:cNvSpPr>
+          <p:nvPr>
+            <p:ph type="subTitle" idx="1"/>
+          </p:nvPr>
+        </p:nvSpPr>
+        <p:spPr/>
+        <p:txBody>
+          <a:bodyPr/>
+          <a:lstStyle/>
+          <a:p>
+            <a:r>
+              <a:rPr lang="en-US" dirty="0"/>
+              <a:t>Alex Berk</a:t>
+            </a:r>
+          </a:p>
+          <a:p>
+            <a:r>
+              <a:rPr lang="en-US" dirty="0"/>
+              <a:t>From </a:t>
+            </a:r>
+            <a:r>
+              <a:rPr lang="en-US" dirty="0" err="1"/>
+              <a:t>ABERK_wq_data_</a:t>
+            </a:r>
+            <a:r>
+              <a:rPr lang="en-US" err="1"/>
+              <a:t>exploration</a:t>
+            </a:r>
+            <a:r>
+              <a:rPr lang="en-US"/>
+              <a:t>.Rmd</a:t>
+            </a:r>
+          </a:p>
+          <a:p>
+            <a:r>
+              <a:rPr lang="en-US" dirty="0"/>
+              <a:t>Last Updated 8/27/25</a:t>
             </a:r>
           </a:p>
         </p:txBody>
@@ -3372,699 +3412,7 @@
     </p:spTree>
     <p:extLst>
       <p:ext uri="{BB962C8B-B14F-4D97-AF65-F5344CB8AC3E}">
-        <p14:creationId xmlns:p14="http://schemas.microsoft.com/office/powerpoint/2010/main" val="3602540564"/>
-      </p:ext>
-    </p:extLst>
-  </p:cSld>
-  <p:clrMapOvr>
-    <a:masterClrMapping/>
-  </p:clrMapOvr>
-</p:sld>
-</file>
-
-<file path=ppt/slides/slide10.xml><?xml version="1.0" encoding="utf-8"?>
-<p:sld xmlns:a="http://schemas.openxmlformats.org/drawingml/2006/main" xmlns:r="http://schemas.openxmlformats.org/officeDocument/2006/relationships" xmlns:p="http://schemas.openxmlformats.org/presentationml/2006/main">
-  <p:cSld>
-    <p:spTree>
-      <p:nvGrpSpPr>
-        <p:cNvPr id="1" name=""/>
-        <p:cNvGrpSpPr/>
-        <p:nvPr/>
-      </p:nvGrpSpPr>
-      <p:grpSpPr>
-        <a:xfrm>
-          <a:off x="0" y="0"/>
-          <a:ext cx="0" cy="0"/>
-          <a:chOff x="0" y="0"/>
-          <a:chExt cx="0" cy="0"/>
-        </a:xfrm>
-      </p:grpSpPr>
-      <p:sp>
-        <p:nvSpPr>
-          <p:cNvPr id="2" name="Title 1">
-            <a:extLst>
-              <a:ext uri="{FF2B5EF4-FFF2-40B4-BE49-F238E27FC236}">
-                <a16:creationId xmlns:a16="http://schemas.microsoft.com/office/drawing/2014/main" id="{893E7BB4-ECEB-1B06-86D7-32928F27C586}"/>
-              </a:ext>
-            </a:extLst>
-          </p:cNvPr>
-          <p:cNvSpPr>
-            <a:spLocks noGrp="1"/>
-          </p:cNvSpPr>
-          <p:nvPr>
-            <p:ph type="title"/>
-          </p:nvPr>
-        </p:nvSpPr>
-        <p:spPr/>
-        <p:txBody>
-          <a:bodyPr/>
-          <a:lstStyle/>
-          <a:p>
-            <a:r>
-              <a:rPr lang="en-US" dirty="0"/>
-              <a:t>North Delta</a:t>
-            </a:r>
-          </a:p>
-        </p:txBody>
-      </p:sp>
-      <p:sp>
-        <p:nvSpPr>
-          <p:cNvPr id="3" name="Text Placeholder 2">
-            <a:extLst>
-              <a:ext uri="{FF2B5EF4-FFF2-40B4-BE49-F238E27FC236}">
-                <a16:creationId xmlns:a16="http://schemas.microsoft.com/office/drawing/2014/main" id="{D649255F-E5FF-531C-034D-136AA28C8715}"/>
-              </a:ext>
-            </a:extLst>
-          </p:cNvPr>
-          <p:cNvSpPr>
-            <a:spLocks noGrp="1"/>
-          </p:cNvSpPr>
-          <p:nvPr>
-            <p:ph type="body" idx="1"/>
-          </p:nvPr>
-        </p:nvSpPr>
-        <p:spPr/>
-        <p:txBody>
-          <a:bodyPr/>
-          <a:lstStyle/>
-          <a:p>
-            <a:endParaRPr lang="en-US"/>
-          </a:p>
-        </p:txBody>
-      </p:sp>
-    </p:spTree>
-    <p:extLst>
-      <p:ext uri="{BB962C8B-B14F-4D97-AF65-F5344CB8AC3E}">
-        <p14:creationId xmlns:p14="http://schemas.microsoft.com/office/powerpoint/2010/main" val="2124660861"/>
-      </p:ext>
-    </p:extLst>
-  </p:cSld>
-  <p:clrMapOvr>
-    <a:masterClrMapping/>
-  </p:clrMapOvr>
-</p:sld>
-</file>
-
-<file path=ppt/slides/slide11.xml><?xml version="1.0" encoding="utf-8"?>
-<p:sld xmlns:a="http://schemas.openxmlformats.org/drawingml/2006/main" xmlns:r="http://schemas.openxmlformats.org/officeDocument/2006/relationships" xmlns:p="http://schemas.openxmlformats.org/presentationml/2006/main">
-  <p:cSld>
-    <p:spTree>
-      <p:nvGrpSpPr>
-        <p:cNvPr id="1" name=""/>
-        <p:cNvGrpSpPr/>
-        <p:nvPr/>
-      </p:nvGrpSpPr>
-      <p:grpSpPr>
-        <a:xfrm>
-          <a:off x="0" y="0"/>
-          <a:ext cx="0" cy="0"/>
-          <a:chOff x="0" y="0"/>
-          <a:chExt cx="0" cy="0"/>
-        </a:xfrm>
-      </p:grpSpPr>
-      <p:pic>
-        <p:nvPicPr>
-          <p:cNvPr id="6" name="Picture 5">
-            <a:extLst>
-              <a:ext uri="{FF2B5EF4-FFF2-40B4-BE49-F238E27FC236}">
-                <a16:creationId xmlns:a16="http://schemas.microsoft.com/office/drawing/2014/main" id="{05294120-184A-605B-8BA5-25E9D9F541BC}"/>
-              </a:ext>
-            </a:extLst>
-          </p:cNvPr>
-          <p:cNvPicPr>
-            <a:picLocks noChangeAspect="1"/>
-          </p:cNvPicPr>
-          <p:nvPr/>
-        </p:nvPicPr>
-        <p:blipFill>
-          <a:blip r:embed="rId2"/>
-          <a:stretch>
-            <a:fillRect/>
-          </a:stretch>
-        </p:blipFill>
-        <p:spPr>
-          <a:xfrm>
-            <a:off x="195513" y="312821"/>
-            <a:ext cx="10312066" cy="6364018"/>
-          </a:xfrm>
-          <a:prstGeom prst="rect">
-            <a:avLst/>
-          </a:prstGeom>
-        </p:spPr>
-      </p:pic>
-    </p:spTree>
-    <p:extLst>
-      <p:ext uri="{BB962C8B-B14F-4D97-AF65-F5344CB8AC3E}">
-        <p14:creationId xmlns:p14="http://schemas.microsoft.com/office/powerpoint/2010/main" val="2404939816"/>
-      </p:ext>
-    </p:extLst>
-  </p:cSld>
-  <p:clrMapOvr>
-    <a:masterClrMapping/>
-  </p:clrMapOvr>
-</p:sld>
-</file>
-
-<file path=ppt/slides/slide12.xml><?xml version="1.0" encoding="utf-8"?>
-<p:sld xmlns:a="http://schemas.openxmlformats.org/drawingml/2006/main" xmlns:r="http://schemas.openxmlformats.org/officeDocument/2006/relationships" xmlns:p="http://schemas.openxmlformats.org/presentationml/2006/main">
-  <p:cSld>
-    <p:spTree>
-      <p:nvGrpSpPr>
-        <p:cNvPr id="1" name=""/>
-        <p:cNvGrpSpPr/>
-        <p:nvPr/>
-      </p:nvGrpSpPr>
-      <p:grpSpPr>
-        <a:xfrm>
-          <a:off x="0" y="0"/>
-          <a:ext cx="0" cy="0"/>
-          <a:chOff x="0" y="0"/>
-          <a:chExt cx="0" cy="0"/>
-        </a:xfrm>
-      </p:grpSpPr>
-      <p:pic>
-        <p:nvPicPr>
-          <p:cNvPr id="4" name="Picture 3">
-            <a:extLst>
-              <a:ext uri="{FF2B5EF4-FFF2-40B4-BE49-F238E27FC236}">
-                <a16:creationId xmlns:a16="http://schemas.microsoft.com/office/drawing/2014/main" id="{8482611C-244B-CC81-44DD-A952D6550352}"/>
-              </a:ext>
-            </a:extLst>
-          </p:cNvPr>
-          <p:cNvPicPr>
-            <a:picLocks noChangeAspect="1"/>
-          </p:cNvPicPr>
-          <p:nvPr/>
-        </p:nvPicPr>
-        <p:blipFill>
-          <a:blip r:embed="rId2"/>
-          <a:stretch>
-            <a:fillRect/>
-          </a:stretch>
-        </p:blipFill>
-        <p:spPr>
-          <a:xfrm>
-            <a:off x="596563" y="326193"/>
-            <a:ext cx="10055393" cy="6205614"/>
-          </a:xfrm>
-          <a:prstGeom prst="rect">
-            <a:avLst/>
-          </a:prstGeom>
-        </p:spPr>
-      </p:pic>
-    </p:spTree>
-    <p:extLst>
-      <p:ext uri="{BB962C8B-B14F-4D97-AF65-F5344CB8AC3E}">
-        <p14:creationId xmlns:p14="http://schemas.microsoft.com/office/powerpoint/2010/main" val="1389642915"/>
-      </p:ext>
-    </p:extLst>
-  </p:cSld>
-  <p:clrMapOvr>
-    <a:masterClrMapping/>
-  </p:clrMapOvr>
-</p:sld>
-</file>
-
-<file path=ppt/slides/slide13.xml><?xml version="1.0" encoding="utf-8"?>
-<p:sld xmlns:a="http://schemas.openxmlformats.org/drawingml/2006/main" xmlns:r="http://schemas.openxmlformats.org/officeDocument/2006/relationships" xmlns:p="http://schemas.openxmlformats.org/presentationml/2006/main">
-  <p:cSld>
-    <p:spTree>
-      <p:nvGrpSpPr>
-        <p:cNvPr id="1" name=""/>
-        <p:cNvGrpSpPr/>
-        <p:nvPr/>
-      </p:nvGrpSpPr>
-      <p:grpSpPr>
-        <a:xfrm>
-          <a:off x="0" y="0"/>
-          <a:ext cx="0" cy="0"/>
-          <a:chOff x="0" y="0"/>
-          <a:chExt cx="0" cy="0"/>
-        </a:xfrm>
-      </p:grpSpPr>
-      <p:sp>
-        <p:nvSpPr>
-          <p:cNvPr id="2" name="Title 1">
-            <a:extLst>
-              <a:ext uri="{FF2B5EF4-FFF2-40B4-BE49-F238E27FC236}">
-                <a16:creationId xmlns:a16="http://schemas.microsoft.com/office/drawing/2014/main" id="{C74E5029-6E4E-C53E-EAC2-CFCE114C1D92}"/>
-              </a:ext>
-            </a:extLst>
-          </p:cNvPr>
-          <p:cNvSpPr>
-            <a:spLocks noGrp="1"/>
-          </p:cNvSpPr>
-          <p:nvPr>
-            <p:ph type="title"/>
-          </p:nvPr>
-        </p:nvSpPr>
-        <p:spPr/>
-        <p:txBody>
-          <a:bodyPr/>
-          <a:lstStyle/>
-          <a:p>
-            <a:r>
-              <a:rPr lang="en-US" dirty="0"/>
-              <a:t>Confluence</a:t>
-            </a:r>
-          </a:p>
-        </p:txBody>
-      </p:sp>
-      <p:sp>
-        <p:nvSpPr>
-          <p:cNvPr id="3" name="Text Placeholder 2">
-            <a:extLst>
-              <a:ext uri="{FF2B5EF4-FFF2-40B4-BE49-F238E27FC236}">
-                <a16:creationId xmlns:a16="http://schemas.microsoft.com/office/drawing/2014/main" id="{7274EAD0-EE16-A0F2-02D4-E6C9CF3DC90B}"/>
-              </a:ext>
-            </a:extLst>
-          </p:cNvPr>
-          <p:cNvSpPr>
-            <a:spLocks noGrp="1"/>
-          </p:cNvSpPr>
-          <p:nvPr>
-            <p:ph type="body" idx="1"/>
-          </p:nvPr>
-        </p:nvSpPr>
-        <p:spPr/>
-        <p:txBody>
-          <a:bodyPr/>
-          <a:lstStyle/>
-          <a:p>
-            <a:endParaRPr lang="en-US"/>
-          </a:p>
-        </p:txBody>
-      </p:sp>
-    </p:spTree>
-    <p:extLst>
-      <p:ext uri="{BB962C8B-B14F-4D97-AF65-F5344CB8AC3E}">
-        <p14:creationId xmlns:p14="http://schemas.microsoft.com/office/powerpoint/2010/main" val="1725794104"/>
-      </p:ext>
-    </p:extLst>
-  </p:cSld>
-  <p:clrMapOvr>
-    <a:masterClrMapping/>
-  </p:clrMapOvr>
-</p:sld>
-</file>
-
-<file path=ppt/slides/slide14.xml><?xml version="1.0" encoding="utf-8"?>
-<p:sld xmlns:a="http://schemas.openxmlformats.org/drawingml/2006/main" xmlns:r="http://schemas.openxmlformats.org/officeDocument/2006/relationships" xmlns:p="http://schemas.openxmlformats.org/presentationml/2006/main">
-  <p:cSld>
-    <p:spTree>
-      <p:nvGrpSpPr>
-        <p:cNvPr id="1" name=""/>
-        <p:cNvGrpSpPr/>
-        <p:nvPr/>
-      </p:nvGrpSpPr>
-      <p:grpSpPr>
-        <a:xfrm>
-          <a:off x="0" y="0"/>
-          <a:ext cx="0" cy="0"/>
-          <a:chOff x="0" y="0"/>
-          <a:chExt cx="0" cy="0"/>
-        </a:xfrm>
-      </p:grpSpPr>
-      <p:pic>
-        <p:nvPicPr>
-          <p:cNvPr id="5" name="Picture 4">
-            <a:extLst>
-              <a:ext uri="{FF2B5EF4-FFF2-40B4-BE49-F238E27FC236}">
-                <a16:creationId xmlns:a16="http://schemas.microsoft.com/office/drawing/2014/main" id="{23F9E6CD-8049-8BE0-A522-96F62D4013FE}"/>
-              </a:ext>
-            </a:extLst>
-          </p:cNvPr>
-          <p:cNvPicPr>
-            <a:picLocks noChangeAspect="1"/>
-          </p:cNvPicPr>
-          <p:nvPr/>
-        </p:nvPicPr>
-        <p:blipFill>
-          <a:blip r:embed="rId2"/>
-          <a:stretch>
-            <a:fillRect/>
-          </a:stretch>
-        </p:blipFill>
-        <p:spPr>
-          <a:xfrm>
-            <a:off x="468228" y="365794"/>
-            <a:ext cx="9927055" cy="6126411"/>
-          </a:xfrm>
-          <a:prstGeom prst="rect">
-            <a:avLst/>
-          </a:prstGeom>
-        </p:spPr>
-      </p:pic>
-    </p:spTree>
-    <p:extLst>
-      <p:ext uri="{BB962C8B-B14F-4D97-AF65-F5344CB8AC3E}">
-        <p14:creationId xmlns:p14="http://schemas.microsoft.com/office/powerpoint/2010/main" val="2159918096"/>
-      </p:ext>
-    </p:extLst>
-  </p:cSld>
-  <p:clrMapOvr>
-    <a:masterClrMapping/>
-  </p:clrMapOvr>
-</p:sld>
-</file>
-
-<file path=ppt/slides/slide15.xml><?xml version="1.0" encoding="utf-8"?>
-<p:sld xmlns:a="http://schemas.openxmlformats.org/drawingml/2006/main" xmlns:r="http://schemas.openxmlformats.org/officeDocument/2006/relationships" xmlns:p="http://schemas.openxmlformats.org/presentationml/2006/main">
-  <p:cSld>
-    <p:spTree>
-      <p:nvGrpSpPr>
-        <p:cNvPr id="1" name=""/>
-        <p:cNvGrpSpPr/>
-        <p:nvPr/>
-      </p:nvGrpSpPr>
-      <p:grpSpPr>
-        <a:xfrm>
-          <a:off x="0" y="0"/>
-          <a:ext cx="0" cy="0"/>
-          <a:chOff x="0" y="0"/>
-          <a:chExt cx="0" cy="0"/>
-        </a:xfrm>
-      </p:grpSpPr>
-      <p:pic>
-        <p:nvPicPr>
-          <p:cNvPr id="2" name="Picture 1">
-            <a:extLst>
-              <a:ext uri="{FF2B5EF4-FFF2-40B4-BE49-F238E27FC236}">
-                <a16:creationId xmlns:a16="http://schemas.microsoft.com/office/drawing/2014/main" id="{0069F518-CD28-6A51-69AD-5D9845597005}"/>
-              </a:ext>
-            </a:extLst>
-          </p:cNvPr>
-          <p:cNvPicPr>
-            <a:picLocks noChangeAspect="1"/>
-          </p:cNvPicPr>
-          <p:nvPr/>
-        </p:nvPicPr>
-        <p:blipFill>
-          <a:blip r:embed="rId2"/>
-          <a:stretch>
-            <a:fillRect/>
-          </a:stretch>
-        </p:blipFill>
-        <p:spPr>
-          <a:xfrm>
-            <a:off x="500313" y="360844"/>
-            <a:ext cx="9943098" cy="6136312"/>
-          </a:xfrm>
-          <a:prstGeom prst="rect">
-            <a:avLst/>
-          </a:prstGeom>
-        </p:spPr>
-      </p:pic>
-    </p:spTree>
-    <p:extLst>
-      <p:ext uri="{BB962C8B-B14F-4D97-AF65-F5344CB8AC3E}">
-        <p14:creationId xmlns:p14="http://schemas.microsoft.com/office/powerpoint/2010/main" val="2812573900"/>
-      </p:ext>
-    </p:extLst>
-  </p:cSld>
-  <p:clrMapOvr>
-    <a:masterClrMapping/>
-  </p:clrMapOvr>
-</p:sld>
-</file>
-
-<file path=ppt/slides/slide16.xml><?xml version="1.0" encoding="utf-8"?>
-<p:sld xmlns:a="http://schemas.openxmlformats.org/drawingml/2006/main" xmlns:r="http://schemas.openxmlformats.org/officeDocument/2006/relationships" xmlns:p="http://schemas.openxmlformats.org/presentationml/2006/main">
-  <p:cSld>
-    <p:spTree>
-      <p:nvGrpSpPr>
-        <p:cNvPr id="1" name=""/>
-        <p:cNvGrpSpPr/>
-        <p:nvPr/>
-      </p:nvGrpSpPr>
-      <p:grpSpPr>
-        <a:xfrm>
-          <a:off x="0" y="0"/>
-          <a:ext cx="0" cy="0"/>
-          <a:chOff x="0" y="0"/>
-          <a:chExt cx="0" cy="0"/>
-        </a:xfrm>
-      </p:grpSpPr>
-      <p:sp>
-        <p:nvSpPr>
-          <p:cNvPr id="2" name="Title 1">
-            <a:extLst>
-              <a:ext uri="{FF2B5EF4-FFF2-40B4-BE49-F238E27FC236}">
-                <a16:creationId xmlns:a16="http://schemas.microsoft.com/office/drawing/2014/main" id="{4275FD1D-9A77-E00B-3CFE-3F6748B7BD3B}"/>
-              </a:ext>
-            </a:extLst>
-          </p:cNvPr>
-          <p:cNvSpPr>
-            <a:spLocks noGrp="1"/>
-          </p:cNvSpPr>
-          <p:nvPr>
-            <p:ph type="title"/>
-          </p:nvPr>
-        </p:nvSpPr>
-        <p:spPr/>
-        <p:txBody>
-          <a:bodyPr/>
-          <a:lstStyle/>
-          <a:p>
-            <a:r>
-              <a:rPr lang="en-US" dirty="0"/>
-              <a:t>Central</a:t>
-            </a:r>
-          </a:p>
-        </p:txBody>
-      </p:sp>
-      <p:sp>
-        <p:nvSpPr>
-          <p:cNvPr id="3" name="Text Placeholder 2">
-            <a:extLst>
-              <a:ext uri="{FF2B5EF4-FFF2-40B4-BE49-F238E27FC236}">
-                <a16:creationId xmlns:a16="http://schemas.microsoft.com/office/drawing/2014/main" id="{E15362DA-41F6-39F8-B2E3-480AD3988848}"/>
-              </a:ext>
-            </a:extLst>
-          </p:cNvPr>
-          <p:cNvSpPr>
-            <a:spLocks noGrp="1"/>
-          </p:cNvSpPr>
-          <p:nvPr>
-            <p:ph type="body" idx="1"/>
-          </p:nvPr>
-        </p:nvSpPr>
-        <p:spPr/>
-        <p:txBody>
-          <a:bodyPr/>
-          <a:lstStyle/>
-          <a:p>
-            <a:endParaRPr lang="en-US"/>
-          </a:p>
-        </p:txBody>
-      </p:sp>
-    </p:spTree>
-    <p:extLst>
-      <p:ext uri="{BB962C8B-B14F-4D97-AF65-F5344CB8AC3E}">
-        <p14:creationId xmlns:p14="http://schemas.microsoft.com/office/powerpoint/2010/main" val="2214863539"/>
-      </p:ext>
-    </p:extLst>
-  </p:cSld>
-  <p:clrMapOvr>
-    <a:masterClrMapping/>
-  </p:clrMapOvr>
-</p:sld>
-</file>
-
-<file path=ppt/slides/slide17.xml><?xml version="1.0" encoding="utf-8"?>
-<p:sld xmlns:a="http://schemas.openxmlformats.org/drawingml/2006/main" xmlns:r="http://schemas.openxmlformats.org/officeDocument/2006/relationships" xmlns:p="http://schemas.openxmlformats.org/presentationml/2006/main">
-  <p:cSld>
-    <p:spTree>
-      <p:nvGrpSpPr>
-        <p:cNvPr id="1" name=""/>
-        <p:cNvGrpSpPr/>
-        <p:nvPr/>
-      </p:nvGrpSpPr>
-      <p:grpSpPr>
-        <a:xfrm>
-          <a:off x="0" y="0"/>
-          <a:ext cx="0" cy="0"/>
-          <a:chOff x="0" y="0"/>
-          <a:chExt cx="0" cy="0"/>
-        </a:xfrm>
-      </p:grpSpPr>
-      <p:pic>
-        <p:nvPicPr>
-          <p:cNvPr id="3" name="Picture 2">
-            <a:extLst>
-              <a:ext uri="{FF2B5EF4-FFF2-40B4-BE49-F238E27FC236}">
-                <a16:creationId xmlns:a16="http://schemas.microsoft.com/office/drawing/2014/main" id="{9D50C0DB-0E0C-03A2-425C-638CC1FA4E16}"/>
-              </a:ext>
-            </a:extLst>
-          </p:cNvPr>
-          <p:cNvPicPr>
-            <a:picLocks noChangeAspect="1"/>
-          </p:cNvPicPr>
-          <p:nvPr/>
-        </p:nvPicPr>
-        <p:blipFill>
-          <a:blip r:embed="rId2"/>
-          <a:stretch>
-            <a:fillRect/>
-          </a:stretch>
-        </p:blipFill>
-        <p:spPr>
-          <a:xfrm>
-            <a:off x="227597" y="152938"/>
-            <a:ext cx="10616866" cy="6552123"/>
-          </a:xfrm>
-          <a:prstGeom prst="rect">
-            <a:avLst/>
-          </a:prstGeom>
-        </p:spPr>
-      </p:pic>
-    </p:spTree>
-    <p:extLst>
-      <p:ext uri="{BB962C8B-B14F-4D97-AF65-F5344CB8AC3E}">
-        <p14:creationId xmlns:p14="http://schemas.microsoft.com/office/powerpoint/2010/main" val="3777567383"/>
-      </p:ext>
-    </p:extLst>
-  </p:cSld>
-  <p:clrMapOvr>
-    <a:masterClrMapping/>
-  </p:clrMapOvr>
-</p:sld>
-</file>
-
-<file path=ppt/slides/slide18.xml><?xml version="1.0" encoding="utf-8"?>
-<p:sld xmlns:a="http://schemas.openxmlformats.org/drawingml/2006/main" xmlns:r="http://schemas.openxmlformats.org/officeDocument/2006/relationships" xmlns:p="http://schemas.openxmlformats.org/presentationml/2006/main">
-  <p:cSld>
-    <p:spTree>
-      <p:nvGrpSpPr>
-        <p:cNvPr id="1" name=""/>
-        <p:cNvGrpSpPr/>
-        <p:nvPr/>
-      </p:nvGrpSpPr>
-      <p:grpSpPr>
-        <a:xfrm>
-          <a:off x="0" y="0"/>
-          <a:ext cx="0" cy="0"/>
-          <a:chOff x="0" y="0"/>
-          <a:chExt cx="0" cy="0"/>
-        </a:xfrm>
-      </p:grpSpPr>
-      <p:pic>
-        <p:nvPicPr>
-          <p:cNvPr id="3" name="Picture 2">
-            <a:extLst>
-              <a:ext uri="{FF2B5EF4-FFF2-40B4-BE49-F238E27FC236}">
-                <a16:creationId xmlns:a16="http://schemas.microsoft.com/office/drawing/2014/main" id="{657F50F8-6666-BF2D-4782-189975A868EC}"/>
-              </a:ext>
-            </a:extLst>
-          </p:cNvPr>
-          <p:cNvPicPr>
-            <a:picLocks noChangeAspect="1"/>
-          </p:cNvPicPr>
-          <p:nvPr/>
-        </p:nvPicPr>
-        <p:blipFill>
-          <a:blip r:embed="rId2"/>
-          <a:stretch>
-            <a:fillRect/>
-          </a:stretch>
-        </p:blipFill>
-        <p:spPr>
-          <a:xfrm>
-            <a:off x="-1" y="122412"/>
-            <a:ext cx="10914147" cy="6735588"/>
-          </a:xfrm>
-          <a:prstGeom prst="rect">
-            <a:avLst/>
-          </a:prstGeom>
-        </p:spPr>
-      </p:pic>
-    </p:spTree>
-    <p:extLst>
-      <p:ext uri="{BB962C8B-B14F-4D97-AF65-F5344CB8AC3E}">
-        <p14:creationId xmlns:p14="http://schemas.microsoft.com/office/powerpoint/2010/main" val="1798840715"/>
-      </p:ext>
-    </p:extLst>
-  </p:cSld>
-  <p:clrMapOvr>
-    <a:masterClrMapping/>
-  </p:clrMapOvr>
-</p:sld>
-</file>
-
-<file path=ppt/slides/slide19.xml><?xml version="1.0" encoding="utf-8"?>
-<p:sld xmlns:a="http://schemas.openxmlformats.org/drawingml/2006/main" xmlns:r="http://schemas.openxmlformats.org/officeDocument/2006/relationships" xmlns:p="http://schemas.openxmlformats.org/presentationml/2006/main">
-  <p:cSld>
-    <p:spTree>
-      <p:nvGrpSpPr>
-        <p:cNvPr id="1" name=""/>
-        <p:cNvGrpSpPr/>
-        <p:nvPr/>
-      </p:nvGrpSpPr>
-      <p:grpSpPr>
-        <a:xfrm>
-          <a:off x="0" y="0"/>
-          <a:ext cx="0" cy="0"/>
-          <a:chOff x="0" y="0"/>
-          <a:chExt cx="0" cy="0"/>
-        </a:xfrm>
-      </p:grpSpPr>
-      <p:sp>
-        <p:nvSpPr>
-          <p:cNvPr id="2" name="Title 1">
-            <a:extLst>
-              <a:ext uri="{FF2B5EF4-FFF2-40B4-BE49-F238E27FC236}">
-                <a16:creationId xmlns:a16="http://schemas.microsoft.com/office/drawing/2014/main" id="{C1945686-E7F8-89CB-3567-A0FAC1DBC2D0}"/>
-              </a:ext>
-            </a:extLst>
-          </p:cNvPr>
-          <p:cNvSpPr>
-            <a:spLocks noGrp="1"/>
-          </p:cNvSpPr>
-          <p:nvPr>
-            <p:ph type="title"/>
-          </p:nvPr>
-        </p:nvSpPr>
-        <p:spPr/>
-        <p:txBody>
-          <a:bodyPr/>
-          <a:lstStyle/>
-          <a:p>
-            <a:r>
-              <a:rPr lang="en-US" dirty="0"/>
-              <a:t>South Delta</a:t>
-            </a:r>
-          </a:p>
-        </p:txBody>
-      </p:sp>
-      <p:sp>
-        <p:nvSpPr>
-          <p:cNvPr id="3" name="Text Placeholder 2">
-            <a:extLst>
-              <a:ext uri="{FF2B5EF4-FFF2-40B4-BE49-F238E27FC236}">
-                <a16:creationId xmlns:a16="http://schemas.microsoft.com/office/drawing/2014/main" id="{27107EEF-11D0-2B0D-E6AC-C16D857C8C16}"/>
-              </a:ext>
-            </a:extLst>
-          </p:cNvPr>
-          <p:cNvSpPr>
-            <a:spLocks noGrp="1"/>
-          </p:cNvSpPr>
-          <p:nvPr>
-            <p:ph type="body" idx="1"/>
-          </p:nvPr>
-        </p:nvSpPr>
-        <p:spPr/>
-        <p:txBody>
-          <a:bodyPr/>
-          <a:lstStyle/>
-          <a:p>
-            <a:endParaRPr lang="en-US"/>
-          </a:p>
-        </p:txBody>
-      </p:sp>
-    </p:spTree>
-    <p:extLst>
-      <p:ext uri="{BB962C8B-B14F-4D97-AF65-F5344CB8AC3E}">
-        <p14:creationId xmlns:p14="http://schemas.microsoft.com/office/powerpoint/2010/main" val="154746367"/>
+        <p14:creationId xmlns:p14="http://schemas.microsoft.com/office/powerpoint/2010/main" val="3464941397"/>
       </p:ext>
     </p:extLst>
   </p:cSld>
@@ -4093,10 +3441,10 @@
       </p:grpSpPr>
       <p:pic>
         <p:nvPicPr>
-          <p:cNvPr id="7" name="Picture 6">
-            <a:extLst>
-              <a:ext uri="{FF2B5EF4-FFF2-40B4-BE49-F238E27FC236}">
-                <a16:creationId xmlns:a16="http://schemas.microsoft.com/office/drawing/2014/main" id="{AFF8035A-8C8E-0989-51D3-7186125097C6}"/>
+          <p:cNvPr id="3" name="Picture 2">
+            <a:extLst>
+              <a:ext uri="{FF2B5EF4-FFF2-40B4-BE49-F238E27FC236}">
+                <a16:creationId xmlns:a16="http://schemas.microsoft.com/office/drawing/2014/main" id="{8EF6D7CF-083C-0F0E-DC04-785D018D8A6D}"/>
               </a:ext>
             </a:extLst>
           </p:cNvPr>
@@ -4113,8 +3461,8 @@
         </p:blipFill>
         <p:spPr>
           <a:xfrm>
-            <a:off x="368968" y="137160"/>
-            <a:ext cx="10668000" cy="6583680"/>
+            <a:off x="633645" y="368147"/>
+            <a:ext cx="9919430" cy="6121706"/>
           </a:xfrm>
           <a:prstGeom prst="rect">
             <a:avLst/>
@@ -4124,127 +3472,7 @@
     </p:spTree>
     <p:extLst>
       <p:ext uri="{BB962C8B-B14F-4D97-AF65-F5344CB8AC3E}">
-        <p14:creationId xmlns:p14="http://schemas.microsoft.com/office/powerpoint/2010/main" val="2356594086"/>
-      </p:ext>
-    </p:extLst>
-  </p:cSld>
-  <p:clrMapOvr>
-    <a:masterClrMapping/>
-  </p:clrMapOvr>
-</p:sld>
-</file>
-
-<file path=ppt/slides/slide20.xml><?xml version="1.0" encoding="utf-8"?>
-<p:sld xmlns:a="http://schemas.openxmlformats.org/drawingml/2006/main" xmlns:r="http://schemas.openxmlformats.org/officeDocument/2006/relationships" xmlns:p="http://schemas.openxmlformats.org/presentationml/2006/main">
-  <p:cSld>
-    <p:spTree>
-      <p:nvGrpSpPr>
-        <p:cNvPr id="1" name=""/>
-        <p:cNvGrpSpPr/>
-        <p:nvPr/>
-      </p:nvGrpSpPr>
-      <p:grpSpPr>
-        <a:xfrm>
-          <a:off x="0" y="0"/>
-          <a:ext cx="0" cy="0"/>
-          <a:chOff x="0" y="0"/>
-          <a:chExt cx="0" cy="0"/>
-        </a:xfrm>
-      </p:grpSpPr>
-      <p:pic>
-        <p:nvPicPr>
-          <p:cNvPr id="4" name="Picture 3">
-            <a:extLst>
-              <a:ext uri="{FF2B5EF4-FFF2-40B4-BE49-F238E27FC236}">
-                <a16:creationId xmlns:a16="http://schemas.microsoft.com/office/drawing/2014/main" id="{A1E52FD7-0AA4-1650-4648-5974EC874427}"/>
-              </a:ext>
-            </a:extLst>
-          </p:cNvPr>
-          <p:cNvPicPr>
-            <a:picLocks noChangeAspect="1"/>
-          </p:cNvPicPr>
-          <p:nvPr/>
-        </p:nvPicPr>
-        <p:blipFill>
-          <a:blip r:embed="rId2"/>
-          <a:stretch>
-            <a:fillRect/>
-          </a:stretch>
-        </p:blipFill>
-        <p:spPr>
-          <a:xfrm>
-            <a:off x="0" y="0"/>
-            <a:ext cx="11112500" cy="6858000"/>
-          </a:xfrm>
-          <a:prstGeom prst="rect">
-            <a:avLst/>
-          </a:prstGeom>
-        </p:spPr>
-      </p:pic>
-    </p:spTree>
-    <p:extLst>
-      <p:ext uri="{BB962C8B-B14F-4D97-AF65-F5344CB8AC3E}">
-        <p14:creationId xmlns:p14="http://schemas.microsoft.com/office/powerpoint/2010/main" val="2917305139"/>
-      </p:ext>
-    </p:extLst>
-  </p:cSld>
-  <p:clrMapOvr>
-    <a:masterClrMapping/>
-  </p:clrMapOvr>
-</p:sld>
-</file>
-
-<file path=ppt/slides/slide21.xml><?xml version="1.0" encoding="utf-8"?>
-<p:sld xmlns:a="http://schemas.openxmlformats.org/drawingml/2006/main" xmlns:r="http://schemas.openxmlformats.org/officeDocument/2006/relationships" xmlns:p="http://schemas.openxmlformats.org/presentationml/2006/main">
-  <p:cSld>
-    <p:spTree>
-      <p:nvGrpSpPr>
-        <p:cNvPr id="1" name=""/>
-        <p:cNvGrpSpPr/>
-        <p:nvPr/>
-      </p:nvGrpSpPr>
-      <p:grpSpPr>
-        <a:xfrm>
-          <a:off x="0" y="0"/>
-          <a:ext cx="0" cy="0"/>
-          <a:chOff x="0" y="0"/>
-          <a:chExt cx="0" cy="0"/>
-        </a:xfrm>
-      </p:grpSpPr>
-      <p:pic>
-        <p:nvPicPr>
-          <p:cNvPr id="3" name="Picture 2">
-            <a:extLst>
-              <a:ext uri="{FF2B5EF4-FFF2-40B4-BE49-F238E27FC236}">
-                <a16:creationId xmlns:a16="http://schemas.microsoft.com/office/drawing/2014/main" id="{91CB594F-A730-82FB-281A-76C6C11223B3}"/>
-              </a:ext>
-            </a:extLst>
-          </p:cNvPr>
-          <p:cNvPicPr>
-            <a:picLocks noChangeAspect="1"/>
-          </p:cNvPicPr>
-          <p:nvPr/>
-        </p:nvPicPr>
-        <p:blipFill>
-          <a:blip r:embed="rId2"/>
-          <a:stretch>
-            <a:fillRect/>
-          </a:stretch>
-        </p:blipFill>
-        <p:spPr>
-          <a:xfrm>
-            <a:off x="0" y="96269"/>
-            <a:ext cx="10956758" cy="6761885"/>
-          </a:xfrm>
-          <a:prstGeom prst="rect">
-            <a:avLst/>
-          </a:prstGeom>
-        </p:spPr>
-      </p:pic>
-    </p:spTree>
-    <p:extLst>
-      <p:ext uri="{BB962C8B-B14F-4D97-AF65-F5344CB8AC3E}">
-        <p14:creationId xmlns:p14="http://schemas.microsoft.com/office/powerpoint/2010/main" val="3675464010"/>
+        <p14:creationId xmlns:p14="http://schemas.microsoft.com/office/powerpoint/2010/main" val="3911746524"/>
       </p:ext>
     </p:extLst>
   </p:cSld>
@@ -4273,10 +3501,10 @@
       </p:grpSpPr>
       <p:pic>
         <p:nvPicPr>
-          <p:cNvPr id="6" name="Picture 5">
-            <a:extLst>
-              <a:ext uri="{FF2B5EF4-FFF2-40B4-BE49-F238E27FC236}">
-                <a16:creationId xmlns:a16="http://schemas.microsoft.com/office/drawing/2014/main" id="{1D80DAC1-D08F-8C77-DBB8-1167D7A672DB}"/>
+          <p:cNvPr id="3" name="Picture 2">
+            <a:extLst>
+              <a:ext uri="{FF2B5EF4-FFF2-40B4-BE49-F238E27FC236}">
+                <a16:creationId xmlns:a16="http://schemas.microsoft.com/office/drawing/2014/main" id="{97A7A728-6084-C709-7D74-E9215E220FC0}"/>
               </a:ext>
             </a:extLst>
           </p:cNvPr>
@@ -4293,8 +3521,8 @@
         </p:blipFill>
         <p:spPr>
           <a:xfrm>
-            <a:off x="112295" y="137160"/>
-            <a:ext cx="10668000" cy="6583680"/>
+            <a:off x="963899" y="261760"/>
+            <a:ext cx="10264202" cy="6334479"/>
           </a:xfrm>
           <a:prstGeom prst="rect">
             <a:avLst/>
@@ -4304,7 +3532,7 @@
     </p:spTree>
     <p:extLst>
       <p:ext uri="{BB962C8B-B14F-4D97-AF65-F5344CB8AC3E}">
-        <p14:creationId xmlns:p14="http://schemas.microsoft.com/office/powerpoint/2010/main" val="1229227700"/>
+        <p14:creationId xmlns:p14="http://schemas.microsoft.com/office/powerpoint/2010/main" val="2458769715"/>
       </p:ext>
     </p:extLst>
   </p:cSld>
@@ -4331,63 +3559,40 @@
           <a:chExt cx="0" cy="0"/>
         </a:xfrm>
       </p:grpSpPr>
-      <p:sp>
-        <p:nvSpPr>
-          <p:cNvPr id="2" name="Title 1">
-            <a:extLst>
-              <a:ext uri="{FF2B5EF4-FFF2-40B4-BE49-F238E27FC236}">
-                <a16:creationId xmlns:a16="http://schemas.microsoft.com/office/drawing/2014/main" id="{2FD84BB9-7589-7540-D09A-77436ADF669C}"/>
-              </a:ext>
-            </a:extLst>
-          </p:cNvPr>
-          <p:cNvSpPr>
-            <a:spLocks noGrp="1"/>
-          </p:cNvSpPr>
-          <p:nvPr>
-            <p:ph type="title"/>
-          </p:nvPr>
-        </p:nvSpPr>
-        <p:spPr/>
-        <p:txBody>
-          <a:bodyPr/>
-          <a:lstStyle/>
-          <a:p>
-            <a:r>
-              <a:rPr lang="en-US" dirty="0"/>
-              <a:t>Suisun Marsh</a:t>
-            </a:r>
-          </a:p>
-        </p:txBody>
-      </p:sp>
-      <p:sp>
-        <p:nvSpPr>
-          <p:cNvPr id="3" name="Text Placeholder 2">
-            <a:extLst>
-              <a:ext uri="{FF2B5EF4-FFF2-40B4-BE49-F238E27FC236}">
-                <a16:creationId xmlns:a16="http://schemas.microsoft.com/office/drawing/2014/main" id="{D35C9D39-FFAF-589E-98A9-4EADC8B69BFF}"/>
-              </a:ext>
-            </a:extLst>
-          </p:cNvPr>
-          <p:cNvSpPr>
-            <a:spLocks noGrp="1"/>
-          </p:cNvSpPr>
-          <p:nvPr>
-            <p:ph type="body" idx="1"/>
-          </p:nvPr>
-        </p:nvSpPr>
-        <p:spPr/>
-        <p:txBody>
-          <a:bodyPr/>
-          <a:lstStyle/>
-          <a:p>
-            <a:endParaRPr lang="en-US"/>
-          </a:p>
-        </p:txBody>
-      </p:sp>
+      <p:pic>
+        <p:nvPicPr>
+          <p:cNvPr id="3" name="Picture 2">
+            <a:extLst>
+              <a:ext uri="{FF2B5EF4-FFF2-40B4-BE49-F238E27FC236}">
+                <a16:creationId xmlns:a16="http://schemas.microsoft.com/office/drawing/2014/main" id="{4EA23A20-4D59-A1C2-1586-41DB999507FF}"/>
+              </a:ext>
+            </a:extLst>
+          </p:cNvPr>
+          <p:cNvPicPr>
+            <a:picLocks noChangeAspect="1"/>
+          </p:cNvPicPr>
+          <p:nvPr/>
+        </p:nvPicPr>
+        <p:blipFill>
+          <a:blip r:embed="rId2"/>
+          <a:stretch>
+            <a:fillRect/>
+          </a:stretch>
+        </p:blipFill>
+        <p:spPr>
+          <a:xfrm>
+            <a:off x="1008869" y="289513"/>
+            <a:ext cx="10174261" cy="6278973"/>
+          </a:xfrm>
+          <a:prstGeom prst="rect">
+            <a:avLst/>
+          </a:prstGeom>
+        </p:spPr>
+      </p:pic>
     </p:spTree>
     <p:extLst>
       <p:ext uri="{BB962C8B-B14F-4D97-AF65-F5344CB8AC3E}">
-        <p14:creationId xmlns:p14="http://schemas.microsoft.com/office/powerpoint/2010/main" val="1420628612"/>
+        <p14:creationId xmlns:p14="http://schemas.microsoft.com/office/powerpoint/2010/main" val="3954957181"/>
       </p:ext>
     </p:extLst>
   </p:cSld>
@@ -4416,10 +3621,10 @@
       </p:grpSpPr>
       <p:pic>
         <p:nvPicPr>
-          <p:cNvPr id="6" name="Picture 5">
-            <a:extLst>
-              <a:ext uri="{FF2B5EF4-FFF2-40B4-BE49-F238E27FC236}">
-                <a16:creationId xmlns:a16="http://schemas.microsoft.com/office/drawing/2014/main" id="{E1B0E117-F5A6-1B30-8886-3F10C4C97578}"/>
+          <p:cNvPr id="3" name="Picture 2">
+            <a:extLst>
+              <a:ext uri="{FF2B5EF4-FFF2-40B4-BE49-F238E27FC236}">
+                <a16:creationId xmlns:a16="http://schemas.microsoft.com/office/drawing/2014/main" id="{190852F2-23E9-B542-1B59-1014BD83617C}"/>
               </a:ext>
             </a:extLst>
           </p:cNvPr>
@@ -4436,8 +3641,8 @@
         </p:blipFill>
         <p:spPr>
           <a:xfrm>
-            <a:off x="339891" y="256891"/>
-            <a:ext cx="10279982" cy="6344217"/>
+            <a:off x="708598" y="224756"/>
+            <a:ext cx="10384124" cy="6408488"/>
           </a:xfrm>
           <a:prstGeom prst="rect">
             <a:avLst/>
@@ -4447,7 +3652,7 @@
     </p:spTree>
     <p:extLst>
       <p:ext uri="{BB962C8B-B14F-4D97-AF65-F5344CB8AC3E}">
-        <p14:creationId xmlns:p14="http://schemas.microsoft.com/office/powerpoint/2010/main" val="3529758396"/>
+        <p14:creationId xmlns:p14="http://schemas.microsoft.com/office/powerpoint/2010/main" val="2626422652"/>
       </p:ext>
     </p:extLst>
   </p:cSld>
@@ -4476,10 +3681,10 @@
       </p:grpSpPr>
       <p:pic>
         <p:nvPicPr>
-          <p:cNvPr id="5" name="Picture 4">
-            <a:extLst>
-              <a:ext uri="{FF2B5EF4-FFF2-40B4-BE49-F238E27FC236}">
-                <a16:creationId xmlns:a16="http://schemas.microsoft.com/office/drawing/2014/main" id="{3BA72DB7-4F51-BE4E-B45A-6476D4900B0A}"/>
+          <p:cNvPr id="3" name="Picture 2">
+            <a:extLst>
+              <a:ext uri="{FF2B5EF4-FFF2-40B4-BE49-F238E27FC236}">
+                <a16:creationId xmlns:a16="http://schemas.microsoft.com/office/drawing/2014/main" id="{381EF649-4631-C0BB-69D8-AD936B9AE66C}"/>
               </a:ext>
             </a:extLst>
           </p:cNvPr>
@@ -4496,8 +3701,8 @@
         </p:blipFill>
         <p:spPr>
           <a:xfrm>
-            <a:off x="243639" y="248652"/>
-            <a:ext cx="10199772" cy="6294717"/>
+            <a:off x="588676" y="266385"/>
+            <a:ext cx="10401525" cy="6419227"/>
           </a:xfrm>
           <a:prstGeom prst="rect">
             <a:avLst/>
@@ -4507,7 +3712,7 @@
     </p:spTree>
     <p:extLst>
       <p:ext uri="{BB962C8B-B14F-4D97-AF65-F5344CB8AC3E}">
-        <p14:creationId xmlns:p14="http://schemas.microsoft.com/office/powerpoint/2010/main" val="3114918317"/>
+        <p14:creationId xmlns:p14="http://schemas.microsoft.com/office/powerpoint/2010/main" val="656808654"/>
       </p:ext>
     </p:extLst>
   </p:cSld>
@@ -4534,63 +3739,40 @@
           <a:chExt cx="0" cy="0"/>
         </a:xfrm>
       </p:grpSpPr>
-      <p:sp>
-        <p:nvSpPr>
-          <p:cNvPr id="2" name="Title 1">
-            <a:extLst>
-              <a:ext uri="{FF2B5EF4-FFF2-40B4-BE49-F238E27FC236}">
-                <a16:creationId xmlns:a16="http://schemas.microsoft.com/office/drawing/2014/main" id="{EF220EF4-375A-3C5F-1B94-2E72434A53A0}"/>
-              </a:ext>
-            </a:extLst>
-          </p:cNvPr>
-          <p:cNvSpPr>
-            <a:spLocks noGrp="1"/>
-          </p:cNvSpPr>
-          <p:nvPr>
-            <p:ph type="title"/>
-          </p:nvPr>
-        </p:nvSpPr>
-        <p:spPr/>
-        <p:txBody>
-          <a:bodyPr/>
-          <a:lstStyle/>
-          <a:p>
-            <a:r>
-              <a:rPr lang="en-US" dirty="0"/>
-              <a:t>Suisun Bay</a:t>
-            </a:r>
-          </a:p>
-        </p:txBody>
-      </p:sp>
-      <p:sp>
-        <p:nvSpPr>
-          <p:cNvPr id="3" name="Text Placeholder 2">
-            <a:extLst>
-              <a:ext uri="{FF2B5EF4-FFF2-40B4-BE49-F238E27FC236}">
-                <a16:creationId xmlns:a16="http://schemas.microsoft.com/office/drawing/2014/main" id="{0D6F0D05-60D3-9986-0327-E3AD41C734CD}"/>
-              </a:ext>
-            </a:extLst>
-          </p:cNvPr>
-          <p:cNvSpPr>
-            <a:spLocks noGrp="1"/>
-          </p:cNvSpPr>
-          <p:nvPr>
-            <p:ph type="body" idx="1"/>
-          </p:nvPr>
-        </p:nvSpPr>
-        <p:spPr/>
-        <p:txBody>
-          <a:bodyPr/>
-          <a:lstStyle/>
-          <a:p>
-            <a:endParaRPr lang="en-US"/>
-          </a:p>
-        </p:txBody>
-      </p:sp>
+      <p:pic>
+        <p:nvPicPr>
+          <p:cNvPr id="3" name="Picture 2">
+            <a:extLst>
+              <a:ext uri="{FF2B5EF4-FFF2-40B4-BE49-F238E27FC236}">
+                <a16:creationId xmlns:a16="http://schemas.microsoft.com/office/drawing/2014/main" id="{8008C9B1-C750-6870-8604-5932F0283C78}"/>
+              </a:ext>
+            </a:extLst>
+          </p:cNvPr>
+          <p:cNvPicPr>
+            <a:picLocks noChangeAspect="1"/>
+          </p:cNvPicPr>
+          <p:nvPr/>
+        </p:nvPicPr>
+        <p:blipFill>
+          <a:blip r:embed="rId2"/>
+          <a:stretch>
+            <a:fillRect/>
+          </a:stretch>
+        </p:blipFill>
+        <p:spPr>
+          <a:xfrm>
+            <a:off x="678617" y="345020"/>
+            <a:ext cx="9994380" cy="6167960"/>
+          </a:xfrm>
+          <a:prstGeom prst="rect">
+            <a:avLst/>
+          </a:prstGeom>
+        </p:spPr>
+      </p:pic>
     </p:spTree>
     <p:extLst>
       <p:ext uri="{BB962C8B-B14F-4D97-AF65-F5344CB8AC3E}">
-        <p14:creationId xmlns:p14="http://schemas.microsoft.com/office/powerpoint/2010/main" val="3656138548"/>
+        <p14:creationId xmlns:p14="http://schemas.microsoft.com/office/powerpoint/2010/main" val="1941035290"/>
       </p:ext>
     </p:extLst>
   </p:cSld>
@@ -4619,10 +3801,10 @@
       </p:grpSpPr>
       <p:pic>
         <p:nvPicPr>
-          <p:cNvPr id="5" name="Picture 4">
-            <a:extLst>
-              <a:ext uri="{FF2B5EF4-FFF2-40B4-BE49-F238E27FC236}">
-                <a16:creationId xmlns:a16="http://schemas.microsoft.com/office/drawing/2014/main" id="{F85B3ED5-EA35-7819-9AF9-DCC58B4744AF}"/>
+          <p:cNvPr id="3" name="Picture 2">
+            <a:extLst>
+              <a:ext uri="{FF2B5EF4-FFF2-40B4-BE49-F238E27FC236}">
+                <a16:creationId xmlns:a16="http://schemas.microsoft.com/office/drawing/2014/main" id="{7A9E616B-2737-C91C-8DBE-65DA6190DF3D}"/>
               </a:ext>
             </a:extLst>
           </p:cNvPr>
@@ -4639,8 +3821,8 @@
         </p:blipFill>
         <p:spPr>
           <a:xfrm>
-            <a:off x="115302" y="227190"/>
-            <a:ext cx="10376235" cy="6403619"/>
+            <a:off x="558694" y="206254"/>
+            <a:ext cx="10444085" cy="6445492"/>
           </a:xfrm>
           <a:prstGeom prst="rect">
             <a:avLst/>
@@ -4650,7 +3832,7 @@
     </p:spTree>
     <p:extLst>
       <p:ext uri="{BB962C8B-B14F-4D97-AF65-F5344CB8AC3E}">
-        <p14:creationId xmlns:p14="http://schemas.microsoft.com/office/powerpoint/2010/main" val="402108645"/>
+        <p14:creationId xmlns:p14="http://schemas.microsoft.com/office/powerpoint/2010/main" val="4023358421"/>
       </p:ext>
     </p:extLst>
   </p:cSld>
@@ -4679,10 +3861,10 @@
       </p:grpSpPr>
       <p:pic>
         <p:nvPicPr>
-          <p:cNvPr id="7" name="Picture 6">
-            <a:extLst>
-              <a:ext uri="{FF2B5EF4-FFF2-40B4-BE49-F238E27FC236}">
-                <a16:creationId xmlns:a16="http://schemas.microsoft.com/office/drawing/2014/main" id="{82DD747F-5E6A-C584-237C-CF53C00C716B}"/>
+          <p:cNvPr id="2" name="Picture 1">
+            <a:extLst>
+              <a:ext uri="{FF2B5EF4-FFF2-40B4-BE49-F238E27FC236}">
+                <a16:creationId xmlns:a16="http://schemas.microsoft.com/office/drawing/2014/main" id="{CE73BAF2-0FB2-DEEB-3DFB-EA3E15572003}"/>
               </a:ext>
             </a:extLst>
           </p:cNvPr>
@@ -4699,8 +3881,8 @@
         </p:blipFill>
         <p:spPr>
           <a:xfrm>
-            <a:off x="275723" y="280737"/>
-            <a:ext cx="10584781" cy="6532322"/>
+            <a:off x="573686" y="206254"/>
+            <a:ext cx="10444084" cy="6445492"/>
           </a:xfrm>
           <a:prstGeom prst="rect">
             <a:avLst/>
@@ -4710,7 +3892,7 @@
     </p:spTree>
     <p:extLst>
       <p:ext uri="{BB962C8B-B14F-4D97-AF65-F5344CB8AC3E}">
-        <p14:creationId xmlns:p14="http://schemas.microsoft.com/office/powerpoint/2010/main" val="3379695856"/>
+        <p14:creationId xmlns:p14="http://schemas.microsoft.com/office/powerpoint/2010/main" val="2043362461"/>
       </p:ext>
     </p:extLst>
   </p:cSld>

--- a/Figures/WQ Exploration with Lag/WQ_exp_with_lag.pptx
+++ b/Figures/WQ Exploration with Lag/WQ_exp_with_lag.pptx
@@ -4215,4 +4215,307 @@
     </a:ext>
   </a:extLst>
 </a:theme>
+</file>
+
+<file path=customXml/item1.xml><?xml version="1.0" encoding="utf-8"?>
+<ct:contentTypeSchema xmlns:ct="http://schemas.microsoft.com/office/2006/metadata/contentType" xmlns:ma="http://schemas.microsoft.com/office/2006/metadata/properties/metaAttributes" ct:_="" ma:_="" ma:contentTypeName="Document" ma:contentTypeID="0x010100CDF426C5941C634898DECC69F43B1B84" ma:contentTypeVersion="19" ma:contentTypeDescription="Create a new document." ma:contentTypeScope="" ma:versionID="60c32b66aab15ddd96dedd0d00727b31">
+  <xsd:schema xmlns:xsd="http://www.w3.org/2001/XMLSchema" xmlns:xs="http://www.w3.org/2001/XMLSchema" xmlns:p="http://schemas.microsoft.com/office/2006/metadata/properties" xmlns:ns1="http://schemas.microsoft.com/sharepoint/v3" xmlns:ns2="a26c063d-e4ab-4c2c-a5f9-3b05989843c6" xmlns:ns3="73166ee1-6b64-49a2-af77-8563fe7cb853" xmlns:ns4="31062a0d-ede8-4112-b4bb-00a9c1bc8e16" targetNamespace="http://schemas.microsoft.com/office/2006/metadata/properties" ma:root="true" ma:fieldsID="5af1b35808a5f3b2dd9f4924c89efa02" ns1:_="" ns2:_="" ns3:_="" ns4:_="">
+    <xsd:import namespace="http://schemas.microsoft.com/sharepoint/v3"/>
+    <xsd:import namespace="a26c063d-e4ab-4c2c-a5f9-3b05989843c6"/>
+    <xsd:import namespace="73166ee1-6b64-49a2-af77-8563fe7cb853"/>
+    <xsd:import namespace="31062a0d-ede8-4112-b4bb-00a9c1bc8e16"/>
+    <xsd:element name="properties">
+      <xsd:complexType>
+        <xsd:sequence>
+          <xsd:element name="documentManagement">
+            <xsd:complexType>
+              <xsd:all>
+                <xsd:element ref="ns2:MediaServiceMetadata" minOccurs="0"/>
+                <xsd:element ref="ns2:MediaServiceFastMetadata" minOccurs="0"/>
+                <xsd:element ref="ns2:MediaServiceAutoTags" minOccurs="0"/>
+                <xsd:element ref="ns2:MediaServiceOCR" minOccurs="0"/>
+                <xsd:element ref="ns2:MediaServiceGenerationTime" minOccurs="0"/>
+                <xsd:element ref="ns2:MediaServiceEventHashCode" minOccurs="0"/>
+                <xsd:element ref="ns2:MediaServiceDateTaken" minOccurs="0"/>
+                <xsd:element ref="ns3:SharedWithUsers" minOccurs="0"/>
+                <xsd:element ref="ns3:SharedWithDetails" minOccurs="0"/>
+                <xsd:element ref="ns1:_ip_UnifiedCompliancePolicyProperties" minOccurs="0"/>
+                <xsd:element ref="ns1:_ip_UnifiedCompliancePolicyUIAction" minOccurs="0"/>
+                <xsd:element ref="ns2:MediaServiceLocation" minOccurs="0"/>
+                <xsd:element ref="ns2:MediaLengthInSeconds" minOccurs="0"/>
+                <xsd:element ref="ns2:lcf76f155ced4ddcb4097134ff3c332f" minOccurs="0"/>
+                <xsd:element ref="ns4:TaxCatchAll" minOccurs="0"/>
+                <xsd:element ref="ns2:MediaServiceObjectDetectorVersions" minOccurs="0"/>
+                <xsd:element ref="ns2:MediaServiceSearchProperties" minOccurs="0"/>
+                <xsd:element ref="ns2:MediaServiceBillingMetadata" minOccurs="0"/>
+              </xsd:all>
+            </xsd:complexType>
+          </xsd:element>
+        </xsd:sequence>
+      </xsd:complexType>
+    </xsd:element>
+  </xsd:schema>
+  <xsd:schema xmlns:xsd="http://www.w3.org/2001/XMLSchema" xmlns:xs="http://www.w3.org/2001/XMLSchema" xmlns:dms="http://schemas.microsoft.com/office/2006/documentManagement/types" xmlns:pc="http://schemas.microsoft.com/office/infopath/2007/PartnerControls" targetNamespace="http://schemas.microsoft.com/sharepoint/v3" elementFormDefault="qualified">
+    <xsd:import namespace="http://schemas.microsoft.com/office/2006/documentManagement/types"/>
+    <xsd:import namespace="http://schemas.microsoft.com/office/infopath/2007/PartnerControls"/>
+    <xsd:element name="_ip_UnifiedCompliancePolicyProperties" ma:index="17" nillable="true" ma:displayName="Unified Compliance Policy Properties" ma:hidden="true" ma:internalName="_ip_UnifiedCompliancePolicyProperties">
+      <xsd:simpleType>
+        <xsd:restriction base="dms:Note"/>
+      </xsd:simpleType>
+    </xsd:element>
+    <xsd:element name="_ip_UnifiedCompliancePolicyUIAction" ma:index="18" nillable="true" ma:displayName="Unified Compliance Policy UI Action" ma:hidden="true" ma:internalName="_ip_UnifiedCompliancePolicyUIAction">
+      <xsd:simpleType>
+        <xsd:restriction base="dms:Text"/>
+      </xsd:simpleType>
+    </xsd:element>
+  </xsd:schema>
+  <xsd:schema xmlns:xsd="http://www.w3.org/2001/XMLSchema" xmlns:xs="http://www.w3.org/2001/XMLSchema" xmlns:dms="http://schemas.microsoft.com/office/2006/documentManagement/types" xmlns:pc="http://schemas.microsoft.com/office/infopath/2007/PartnerControls" targetNamespace="a26c063d-e4ab-4c2c-a5f9-3b05989843c6" elementFormDefault="qualified">
+    <xsd:import namespace="http://schemas.microsoft.com/office/2006/documentManagement/types"/>
+    <xsd:import namespace="http://schemas.microsoft.com/office/infopath/2007/PartnerControls"/>
+    <xsd:element name="MediaServiceMetadata" ma:index="8" nillable="true" ma:displayName="MediaServiceMetadata" ma:hidden="true" ma:internalName="MediaServiceMetadata" ma:readOnly="true">
+      <xsd:simpleType>
+        <xsd:restriction base="dms:Note"/>
+      </xsd:simpleType>
+    </xsd:element>
+    <xsd:element name="MediaServiceFastMetadata" ma:index="9" nillable="true" ma:displayName="MediaServiceFastMetadata" ma:hidden="true" ma:internalName="MediaServiceFastMetadata" ma:readOnly="true">
+      <xsd:simpleType>
+        <xsd:restriction base="dms:Note"/>
+      </xsd:simpleType>
+    </xsd:element>
+    <xsd:element name="MediaServiceAutoTags" ma:index="10" nillable="true" ma:displayName="Tags" ma:internalName="MediaServiceAutoTags" ma:readOnly="true">
+      <xsd:simpleType>
+        <xsd:restriction base="dms:Text"/>
+      </xsd:simpleType>
+    </xsd:element>
+    <xsd:element name="MediaServiceOCR" ma:index="11" nillable="true" ma:displayName="Extracted Text" ma:internalName="MediaServiceOCR" ma:readOnly="true">
+      <xsd:simpleType>
+        <xsd:restriction base="dms:Note">
+          <xsd:maxLength value="255"/>
+        </xsd:restriction>
+      </xsd:simpleType>
+    </xsd:element>
+    <xsd:element name="MediaServiceGenerationTime" ma:index="12" nillable="true" ma:displayName="MediaServiceGenerationTime" ma:hidden="true" ma:internalName="MediaServiceGenerationTime" ma:readOnly="true">
+      <xsd:simpleType>
+        <xsd:restriction base="dms:Text"/>
+      </xsd:simpleType>
+    </xsd:element>
+    <xsd:element name="MediaServiceEventHashCode" ma:index="13" nillable="true" ma:displayName="MediaServiceEventHashCode" ma:hidden="true" ma:internalName="MediaServiceEventHashCode" ma:readOnly="true">
+      <xsd:simpleType>
+        <xsd:restriction base="dms:Text"/>
+      </xsd:simpleType>
+    </xsd:element>
+    <xsd:element name="MediaServiceDateTaken" ma:index="14" nillable="true" ma:displayName="MediaServiceDateTaken" ma:hidden="true" ma:internalName="MediaServiceDateTaken" ma:readOnly="true">
+      <xsd:simpleType>
+        <xsd:restriction base="dms:Text"/>
+      </xsd:simpleType>
+    </xsd:element>
+    <xsd:element name="MediaServiceLocation" ma:index="19" nillable="true" ma:displayName="Location" ma:internalName="MediaServiceLocation" ma:readOnly="true">
+      <xsd:simpleType>
+        <xsd:restriction base="dms:Text"/>
+      </xsd:simpleType>
+    </xsd:element>
+    <xsd:element name="MediaLengthInSeconds" ma:index="20" nillable="true" ma:displayName="MediaLengthInSeconds" ma:hidden="true" ma:internalName="MediaLengthInSeconds" ma:readOnly="true">
+      <xsd:simpleType>
+        <xsd:restriction base="dms:Unknown"/>
+      </xsd:simpleType>
+    </xsd:element>
+    <xsd:element name="lcf76f155ced4ddcb4097134ff3c332f" ma:index="22" nillable="true" ma:taxonomy="true" ma:internalName="lcf76f155ced4ddcb4097134ff3c332f" ma:taxonomyFieldName="MediaServiceImageTags" ma:displayName="Image Tags" ma:readOnly="false" ma:fieldId="{5cf76f15-5ced-4ddc-b409-7134ff3c332f}" ma:taxonomyMulti="true" ma:sspId="9c5df3ad-b4e5-45d1-88c9-23db5f1fe618" ma:termSetId="09814cd3-568e-fe90-9814-8d621ff8fb84" ma:anchorId="fba54fb3-c3e1-fe81-a776-ca4b69148c4d" ma:open="true" ma:isKeyword="false">
+      <xsd:complexType>
+        <xsd:sequence>
+          <xsd:element ref="pc:Terms" minOccurs="0" maxOccurs="1"/>
+        </xsd:sequence>
+      </xsd:complexType>
+    </xsd:element>
+    <xsd:element name="MediaServiceObjectDetectorVersions" ma:index="24" nillable="true" ma:displayName="MediaServiceObjectDetectorVersions" ma:description="" ma:hidden="true" ma:indexed="true" ma:internalName="MediaServiceObjectDetectorVersions" ma:readOnly="true">
+      <xsd:simpleType>
+        <xsd:restriction base="dms:Text"/>
+      </xsd:simpleType>
+    </xsd:element>
+    <xsd:element name="MediaServiceSearchProperties" ma:index="25" nillable="true" ma:displayName="MediaServiceSearchProperties" ma:hidden="true" ma:internalName="MediaServiceSearchProperties" ma:readOnly="true">
+      <xsd:simpleType>
+        <xsd:restriction base="dms:Note"/>
+      </xsd:simpleType>
+    </xsd:element>
+    <xsd:element name="MediaServiceBillingMetadata" ma:index="26" nillable="true" ma:displayName="MediaServiceBillingMetadata" ma:hidden="true" ma:internalName="MediaServiceBillingMetadata" ma:readOnly="true">
+      <xsd:simpleType>
+        <xsd:restriction base="dms:Note"/>
+      </xsd:simpleType>
+    </xsd:element>
+  </xsd:schema>
+  <xsd:schema xmlns:xsd="http://www.w3.org/2001/XMLSchema" xmlns:xs="http://www.w3.org/2001/XMLSchema" xmlns:dms="http://schemas.microsoft.com/office/2006/documentManagement/types" xmlns:pc="http://schemas.microsoft.com/office/infopath/2007/PartnerControls" targetNamespace="73166ee1-6b64-49a2-af77-8563fe7cb853" elementFormDefault="qualified">
+    <xsd:import namespace="http://schemas.microsoft.com/office/2006/documentManagement/types"/>
+    <xsd:import namespace="http://schemas.microsoft.com/office/infopath/2007/PartnerControls"/>
+    <xsd:element name="SharedWithUsers" ma:index="15" nillable="true" ma:displayName="Shared With" ma:internalName="SharedWithUsers" ma:readOnly="true">
+      <xsd:complexType>
+        <xsd:complexContent>
+          <xsd:extension base="dms:UserMulti">
+            <xsd:sequence>
+              <xsd:element name="UserInfo" minOccurs="0" maxOccurs="unbounded">
+                <xsd:complexType>
+                  <xsd:sequence>
+                    <xsd:element name="DisplayName" type="xsd:string" minOccurs="0"/>
+                    <xsd:element name="AccountId" type="dms:UserId" minOccurs="0" nillable="true"/>
+                    <xsd:element name="AccountType" type="xsd:string" minOccurs="0"/>
+                  </xsd:sequence>
+                </xsd:complexType>
+              </xsd:element>
+            </xsd:sequence>
+          </xsd:extension>
+        </xsd:complexContent>
+      </xsd:complexType>
+    </xsd:element>
+    <xsd:element name="SharedWithDetails" ma:index="16" nillable="true" ma:displayName="Shared With Details" ma:internalName="SharedWithDetails" ma:readOnly="true">
+      <xsd:simpleType>
+        <xsd:restriction base="dms:Note">
+          <xsd:maxLength value="255"/>
+        </xsd:restriction>
+      </xsd:simpleType>
+    </xsd:element>
+  </xsd:schema>
+  <xsd:schema xmlns:xsd="http://www.w3.org/2001/XMLSchema" xmlns:xs="http://www.w3.org/2001/XMLSchema" xmlns:dms="http://schemas.microsoft.com/office/2006/documentManagement/types" xmlns:pc="http://schemas.microsoft.com/office/infopath/2007/PartnerControls" targetNamespace="31062a0d-ede8-4112-b4bb-00a9c1bc8e16" elementFormDefault="qualified">
+    <xsd:import namespace="http://schemas.microsoft.com/office/2006/documentManagement/types"/>
+    <xsd:import namespace="http://schemas.microsoft.com/office/infopath/2007/PartnerControls"/>
+    <xsd:element name="TaxCatchAll" ma:index="23" nillable="true" ma:displayName="Taxonomy Catch All Column" ma:hidden="true" ma:list="{5171f4bf-df9e-4530-a04f-417f2293f133}" ma:internalName="TaxCatchAll" ma:showField="CatchAllData" ma:web="73166ee1-6b64-49a2-af77-8563fe7cb853">
+      <xsd:complexType>
+        <xsd:complexContent>
+          <xsd:extension base="dms:MultiChoiceLookup">
+            <xsd:sequence>
+              <xsd:element name="Value" type="dms:Lookup" maxOccurs="unbounded" minOccurs="0" nillable="true"/>
+            </xsd:sequence>
+          </xsd:extension>
+        </xsd:complexContent>
+      </xsd:complexType>
+    </xsd:element>
+  </xsd:schema>
+  <xsd:schema xmlns="http://schemas.openxmlformats.org/package/2006/metadata/core-properties" xmlns:xsd="http://www.w3.org/2001/XMLSchema" xmlns:xsi="http://www.w3.org/2001/XMLSchema-instance" xmlns:dc="http://purl.org/dc/elements/1.1/" xmlns:dcterms="http://purl.org/dc/terms/" xmlns:odoc="http://schemas.microsoft.com/internal/obd" targetNamespace="http://schemas.openxmlformats.org/package/2006/metadata/core-properties" elementFormDefault="qualified" attributeFormDefault="unqualified" blockDefault="#all">
+    <xsd:import namespace="http://purl.org/dc/elements/1.1/" schemaLocation="http://dublincore.org/schemas/xmls/qdc/2003/04/02/dc.xsd"/>
+    <xsd:import namespace="http://purl.org/dc/terms/" schemaLocation="http://dublincore.org/schemas/xmls/qdc/2003/04/02/dcterms.xsd"/>
+    <xsd:element name="coreProperties" type="CT_coreProperties"/>
+    <xsd:complexType name="CT_coreProperties">
+      <xsd:all>
+        <xsd:element ref="dc:creator" minOccurs="0" maxOccurs="1"/>
+        <xsd:element ref="dcterms:created" minOccurs="0" maxOccurs="1"/>
+        <xsd:element ref="dc:identifier" minOccurs="0" maxOccurs="1"/>
+        <xsd:element name="contentType" minOccurs="0" maxOccurs="1" type="xsd:string" ma:index="0" ma:displayName="Content Type"/>
+        <xsd:element ref="dc:title" minOccurs="0" maxOccurs="1" ma:index="4" ma:displayName="Title"/>
+        <xsd:element ref="dc:subject" minOccurs="0" maxOccurs="1"/>
+        <xsd:element ref="dc:description" minOccurs="0" maxOccurs="1"/>
+        <xsd:element name="keywords" minOccurs="0" maxOccurs="1" type="xsd:string"/>
+        <xsd:element ref="dc:language" minOccurs="0" maxOccurs="1"/>
+        <xsd:element name="category" minOccurs="0" maxOccurs="1" type="xsd:string"/>
+        <xsd:element name="version" minOccurs="0" maxOccurs="1" type="xsd:string"/>
+        <xsd:element name="revision" minOccurs="0" maxOccurs="1" type="xsd:string">
+          <xsd:annotation>
+            <xsd:documentation>
+                        This value indicates the number of saves or revisions. The application is responsible for updating this value after each revision.
+                    </xsd:documentation>
+          </xsd:annotation>
+        </xsd:element>
+        <xsd:element name="lastModifiedBy" minOccurs="0" maxOccurs="1" type="xsd:string"/>
+        <xsd:element ref="dcterms:modified" minOccurs="0" maxOccurs="1"/>
+        <xsd:element name="contentStatus" minOccurs="0" maxOccurs="1" type="xsd:string"/>
+      </xsd:all>
+    </xsd:complexType>
+  </xsd:schema>
+  <xs:schema xmlns:pc="http://schemas.microsoft.com/office/infopath/2007/PartnerControls" xmlns:xs="http://www.w3.org/2001/XMLSchema" targetNamespace="http://schemas.microsoft.com/office/infopath/2007/PartnerControls" elementFormDefault="qualified" attributeFormDefault="unqualified">
+    <xs:element name="Person">
+      <xs:complexType>
+        <xs:sequence>
+          <xs:element ref="pc:DisplayName" minOccurs="0"/>
+          <xs:element ref="pc:AccountId" minOccurs="0"/>
+          <xs:element ref="pc:AccountType" minOccurs="0"/>
+        </xs:sequence>
+      </xs:complexType>
+    </xs:element>
+    <xs:element name="DisplayName" type="xs:string"/>
+    <xs:element name="AccountId" type="xs:string"/>
+    <xs:element name="AccountType" type="xs:string"/>
+    <xs:element name="BDCAssociatedEntity">
+      <xs:complexType>
+        <xs:sequence>
+          <xs:element ref="pc:BDCEntity" minOccurs="0" maxOccurs="unbounded"/>
+        </xs:sequence>
+        <xs:attribute ref="pc:EntityNamespace"/>
+        <xs:attribute ref="pc:EntityName"/>
+        <xs:attribute ref="pc:SystemInstanceName"/>
+        <xs:attribute ref="pc:AssociationName"/>
+      </xs:complexType>
+    </xs:element>
+    <xs:attribute name="EntityNamespace" type="xs:string"/>
+    <xs:attribute name="EntityName" type="xs:string"/>
+    <xs:attribute name="SystemInstanceName" type="xs:string"/>
+    <xs:attribute name="AssociationName" type="xs:string"/>
+    <xs:element name="BDCEntity">
+      <xs:complexType>
+        <xs:sequence>
+          <xs:element ref="pc:EntityDisplayName" minOccurs="0"/>
+          <xs:element ref="pc:EntityInstanceReference" minOccurs="0"/>
+          <xs:element ref="pc:EntityId1" minOccurs="0"/>
+          <xs:element ref="pc:EntityId2" minOccurs="0"/>
+          <xs:element ref="pc:EntityId3" minOccurs="0"/>
+          <xs:element ref="pc:EntityId4" minOccurs="0"/>
+          <xs:element ref="pc:EntityId5" minOccurs="0"/>
+        </xs:sequence>
+      </xs:complexType>
+    </xs:element>
+    <xs:element name="EntityDisplayName" type="xs:string"/>
+    <xs:element name="EntityInstanceReference" type="xs:string"/>
+    <xs:element name="EntityId1" type="xs:string"/>
+    <xs:element name="EntityId2" type="xs:string"/>
+    <xs:element name="EntityId3" type="xs:string"/>
+    <xs:element name="EntityId4" type="xs:string"/>
+    <xs:element name="EntityId5" type="xs:string"/>
+    <xs:element name="Terms">
+      <xs:complexType>
+        <xs:sequence>
+          <xs:element ref="pc:TermInfo" minOccurs="0" maxOccurs="unbounded"/>
+        </xs:sequence>
+      </xs:complexType>
+    </xs:element>
+    <xs:element name="TermInfo">
+      <xs:complexType>
+        <xs:sequence>
+          <xs:element ref="pc:TermName" minOccurs="0"/>
+          <xs:element ref="pc:TermId" minOccurs="0"/>
+        </xs:sequence>
+      </xs:complexType>
+    </xs:element>
+    <xs:element name="TermName" type="xs:string"/>
+    <xs:element name="TermId" type="xs:string"/>
+  </xs:schema>
+</ct:contentTypeSchema>
+</file>
+
+<file path=customXml/item2.xml><?xml version="1.0" encoding="utf-8"?>
+<?mso-contentType ?>
+<FormTemplates xmlns="http://schemas.microsoft.com/sharepoint/v3/contenttype/forms">
+  <Display>DocumentLibraryForm</Display>
+  <Edit>DocumentLibraryForm</Edit>
+  <New>DocumentLibraryForm</New>
+</FormTemplates>
+</file>
+
+<file path=customXml/item3.xml><?xml version="1.0" encoding="utf-8"?>
+<p:properties xmlns:p="http://schemas.microsoft.com/office/2006/metadata/properties" xmlns:xsi="http://www.w3.org/2001/XMLSchema-instance" xmlns:pc="http://schemas.microsoft.com/office/infopath/2007/PartnerControls">
+  <documentManagement>
+    <_ip_UnifiedCompliancePolicyUIAction xmlns="http://schemas.microsoft.com/sharepoint/v3" xsi:nil="true"/>
+    <lcf76f155ced4ddcb4097134ff3c332f xmlns="a26c063d-e4ab-4c2c-a5f9-3b05989843c6">
+      <Terms xmlns="http://schemas.microsoft.com/office/infopath/2007/PartnerControls"/>
+    </lcf76f155ced4ddcb4097134ff3c332f>
+    <_ip_UnifiedCompliancePolicyProperties xmlns="http://schemas.microsoft.com/sharepoint/v3" xsi:nil="true"/>
+    <TaxCatchAll xmlns="31062a0d-ede8-4112-b4bb-00a9c1bc8e16" xsi:nil="true"/>
+  </documentManagement>
+</p:properties>
+</file>
+
+<file path=customXml/itemProps1.xml><?xml version="1.0" encoding="utf-8"?>
+<ds:datastoreItem xmlns:ds="http://schemas.openxmlformats.org/officeDocument/2006/customXml" ds:itemID="{BE986AD5-59B1-4D2A-B557-BD9664A74DDE}"/>
+</file>
+
+<file path=customXml/itemProps2.xml><?xml version="1.0" encoding="utf-8"?>
+<ds:datastoreItem xmlns:ds="http://schemas.openxmlformats.org/officeDocument/2006/customXml" ds:itemID="{7017E90B-438D-441D-8844-8D194CF732F0}"/>
+</file>
+
+<file path=customXml/itemProps3.xml><?xml version="1.0" encoding="utf-8"?>
+<ds:datastoreItem xmlns:ds="http://schemas.openxmlformats.org/officeDocument/2006/customXml" ds:itemID="{E82317F5-E712-43C7-9A3D-C3B07861158A}"/>
 </file>